--- a/Poster.pptx
+++ b/Poster.pptx
@@ -5763,7 +5763,7 @@
                 <a:ea typeface="Lato" panose="020F0502020204030203" pitchFamily="34" charset="0"/>
                 <a:cs typeface="Lato" panose="020F0502020204030203" pitchFamily="34" charset="0"/>
               </a:rPr>
-              <a:t>Figure 1. A “fire” and ”no-fire” image from ”The Wildfire Dataset” [2]. </a:t>
+              <a:t>Figure 1 + 2. A “fire” and ”no-fire” image from ”The Wildfire Dataset” [2]. </a:t>
             </a:r>
             <a:endParaRPr lang="en-US" sz="2800" dirty="0"/>
           </a:p>
@@ -5798,7 +5798,7 @@
         </p:blipFill>
         <p:spPr bwMode="auto">
           <a:xfrm>
-            <a:off x="16145871" y="21797120"/>
+            <a:off x="16145871" y="21652944"/>
             <a:ext cx="15228016" cy="6271795"/>
           </a:xfrm>
           <a:prstGeom prst="rect">
@@ -5845,7 +5845,7 @@
         </p:blipFill>
         <p:spPr bwMode="auto">
           <a:xfrm>
-            <a:off x="1305626" y="28255840"/>
+            <a:off x="1305626" y="27660600"/>
             <a:ext cx="13777885" cy="3599031"/>
           </a:xfrm>
           <a:prstGeom prst="rect">
@@ -6092,7 +6092,7 @@
             </a:r>
             <a:r>
               <a:rPr lang="en-US" sz="4800" dirty="0"/>
-              <a:t> Achieved 82.14% validation accuracy, with moderate overfitting indicated by rising validation loss. Despite regularization (dropout, batch normalization), the model misclassified some samples (82 false positives, 63 false negatives), suggesting potential gains from data augmentation or architecture tuning.</a:t>
+              <a:t> Achieved 82.14% validation accuracy, with moderate overfitting indicated by rising validation loss. Despite regularization the model misclassified some samples (82 false positives, 63 false negatives), suggesting potential gains from data augmentation or architecture tuning.</a:t>
             </a:r>
           </a:p>
         </p:txBody>
@@ -6111,7 +6111,7 @@
         </p:nvSpPr>
         <p:spPr>
           <a:xfrm>
-            <a:off x="15610950" y="28074608"/>
+            <a:off x="15763348" y="28432727"/>
             <a:ext cx="15554850" cy="3785652"/>
           </a:xfrm>
           <a:prstGeom prst="rect">
@@ -6131,8 +6131,107 @@
             </a:r>
             <a:r>
               <a:rPr lang="en-US" sz="4800" dirty="0"/>
-              <a:t> Demonstrated strong learning on training data (R² &gt; 0.7) but failed to generalize (test R² ≈ 0), indicating overfitting and architectural mismatch for the dataset size and quality. Additional regularization and improved feature engineering are needed for better test performance.</a:t>
-            </a:r>
+              <a:t> Demonstrated strong learning on training data  but failed to generalize (test R² ≈ 0), indicating overfitting and architectural mismatch for the dataset size and quality. Additional regularization and improved feature engineering are needed for better test performance.</a:t>
+            </a:r>
+          </a:p>
+        </p:txBody>
+      </p:sp>
+      <p:sp>
+        <p:nvSpPr>
+          <p:cNvPr id="22" name="TextBox 21">
+            <a:extLst>
+              <a:ext uri="{FF2B5EF4-FFF2-40B4-BE49-F238E27FC236}">
+                <a16:creationId xmlns:a16="http://schemas.microsoft.com/office/drawing/2014/main" id="{77821EE0-FE8F-E5C8-85AA-2D95F27B9095}"/>
+              </a:ext>
+            </a:extLst>
+          </p:cNvPr>
+          <p:cNvSpPr txBox="1"/>
+          <p:nvPr/>
+        </p:nvSpPr>
+        <p:spPr>
+          <a:xfrm>
+            <a:off x="16992596" y="27732620"/>
+            <a:ext cx="13777885" cy="523220"/>
+          </a:xfrm>
+          <a:prstGeom prst="rect">
+            <a:avLst/>
+          </a:prstGeom>
+          <a:noFill/>
+        </p:spPr>
+        <p:txBody>
+          <a:bodyPr wrap="square">
+            <a:spAutoFit/>
+          </a:bodyPr>
+          <a:lstStyle/>
+          <a:p>
+            <a:r>
+              <a:rPr lang="en-US" sz="2800" b="0" dirty="0">
+                <a:effectLst/>
+                <a:latin typeface="Lato" panose="020F0502020204030203" pitchFamily="34" charset="0"/>
+                <a:ea typeface="Lato" panose="020F0502020204030203" pitchFamily="34" charset="0"/>
+                <a:cs typeface="Lato" panose="020F0502020204030203" pitchFamily="34" charset="0"/>
+              </a:rPr>
+              <a:t>Figure 3 + 4: Accuracy and loss over epochs for training and validation sets for CNN.</a:t>
+            </a:r>
+            <a:endParaRPr lang="en-US" sz="2800" dirty="0"/>
+          </a:p>
+        </p:txBody>
+      </p:sp>
+      <p:sp>
+        <p:nvSpPr>
+          <p:cNvPr id="27" name="TextBox 26">
+            <a:extLst>
+              <a:ext uri="{FF2B5EF4-FFF2-40B4-BE49-F238E27FC236}">
+                <a16:creationId xmlns:a16="http://schemas.microsoft.com/office/drawing/2014/main" id="{720671EE-D73E-6A6A-68B2-92DBFCC5DBE6}"/>
+              </a:ext>
+            </a:extLst>
+          </p:cNvPr>
+          <p:cNvSpPr txBox="1"/>
+          <p:nvPr/>
+        </p:nvSpPr>
+        <p:spPr>
+          <a:xfrm>
+            <a:off x="1260398" y="31398587"/>
+            <a:ext cx="13777885" cy="523220"/>
+          </a:xfrm>
+          <a:prstGeom prst="rect">
+            <a:avLst/>
+          </a:prstGeom>
+          <a:noFill/>
+        </p:spPr>
+        <p:txBody>
+          <a:bodyPr wrap="square">
+            <a:spAutoFit/>
+          </a:bodyPr>
+          <a:lstStyle/>
+          <a:p>
+            <a:r>
+              <a:rPr lang="en-US" sz="2800" b="0" dirty="0">
+                <a:effectLst/>
+                <a:latin typeface="Lato" panose="020F0502020204030203" pitchFamily="34" charset="0"/>
+                <a:ea typeface="Lato" panose="020F0502020204030203" pitchFamily="34" charset="0"/>
+                <a:cs typeface="Lato" panose="020F0502020204030203" pitchFamily="34" charset="0"/>
+              </a:rPr>
+              <a:t>Figure </a:t>
+            </a:r>
+            <a:r>
+              <a:rPr lang="en-US" sz="2800" dirty="0">
+                <a:latin typeface="Lato" panose="020F0502020204030203" pitchFamily="34" charset="0"/>
+                <a:ea typeface="Lato" panose="020F0502020204030203" pitchFamily="34" charset="0"/>
+                <a:cs typeface="Lato" panose="020F0502020204030203" pitchFamily="34" charset="0"/>
+              </a:rPr>
+              <a:t>5</a:t>
+            </a:r>
+            <a:r>
+              <a:rPr lang="en-US" sz="2800" b="0" dirty="0">
+                <a:effectLst/>
+                <a:latin typeface="Lato" panose="020F0502020204030203" pitchFamily="34" charset="0"/>
+                <a:ea typeface="Lato" panose="020F0502020204030203" pitchFamily="34" charset="0"/>
+                <a:cs typeface="Lato" panose="020F0502020204030203" pitchFamily="34" charset="0"/>
+              </a:rPr>
+              <a:t>: MLP metrics containing loss for training and testing sets and R^2 value.</a:t>
+            </a:r>
+            <a:endParaRPr lang="en-US" sz="2800" dirty="0"/>
           </a:p>
         </p:txBody>
       </p:sp>

--- a/Poster.pptx
+++ b/Poster.pptx
@@ -5056,7 +5056,7 @@
                 </a:solidFill>
                 <a:latin typeface="+mj-lt"/>
               </a:rPr>
-              <a:t>Results</a:t>
+              <a:t>Results and Discussion</a:t>
             </a:r>
           </a:p>
         </p:txBody>
@@ -7612,10 +7612,17 @@
 <file path=customXml/itemProps1.xml><?xml version="1.0" encoding="utf-8"?>
 <ds:datastoreItem xmlns:ds="http://schemas.openxmlformats.org/officeDocument/2006/customXml" ds:itemID="{EA5F3152-1B22-4120-90AD-ABECC3E883B9}">
   <ds:schemaRefs>
+    <ds:schemaRef ds:uri="http://purl.org/dc/dcmitype/"/>
+    <ds:schemaRef ds:uri="http://purl.org/dc/elements/1.1/"/>
+    <ds:schemaRef ds:uri="http://purl.org/dc/terms/"/>
     <ds:schemaRef ds:uri="http://schemas.microsoft.com/office/2006/metadata/properties"/>
+    <ds:schemaRef ds:uri="http://schemas.openxmlformats.org/package/2006/metadata/core-properties"/>
+    <ds:schemaRef ds:uri="8380694e-df13-4765-9f36-450494b12df9"/>
+    <ds:schemaRef ds:uri="http://schemas.microsoft.com/office/2006/documentManagement/types"/>
+    <ds:schemaRef ds:uri="http://www.w3.org/XML/1998/namespace"/>
     <ds:schemaRef ds:uri="http://schemas.microsoft.com/office/infopath/2007/PartnerControls"/>
+    <ds:schemaRef ds:uri="e9952153-5aa5-42e8-8300-ccc6398e6c31"/>
     <ds:schemaRef ds:uri="251e4a2b-1a33-4513-9017-f0bb34cca31e"/>
-    <ds:schemaRef ds:uri="e9952153-5aa5-42e8-8300-ccc6398e6c31"/>
   </ds:schemaRefs>
 </ds:datastoreItem>
 </file>

--- a/Poster.pptx
+++ b/Poster.pptx
@@ -860,7 +860,7 @@
           <a:p>
             <a:fld id="{3E6A3A3A-F046-46B7-AB30-656DBACC10AF}" type="datetimeFigureOut">
               <a:rPr lang="en-US" smtClean="0"/>
-              <a:t>4/12/2025</a:t>
+              <a:t>4/13/2025</a:t>
             </a:fld>
             <a:endParaRPr lang="en-US"/>
           </a:p>
@@ -1025,7 +1025,7 @@
           <a:p>
             <a:fld id="{3BAAEEF9-7578-433F-ACA7-67A4266BF312}" type="datetimeFigureOut">
               <a:rPr lang="en-US" smtClean="0"/>
-              <a:t>4/12/2025</a:t>
+              <a:t>4/13/2025</a:t>
             </a:fld>
             <a:endParaRPr lang="en-US"/>
           </a:p>
@@ -1471,7 +1471,7 @@
           <a:p>
             <a:fld id="{24E1524C-2386-4A77-AA3F-47DF77D98E67}" type="datetimeFigureOut">
               <a:rPr lang="en-US" smtClean="0"/>
-              <a:t>4/12/2025</a:t>
+              <a:t>4/13/2025</a:t>
             </a:fld>
             <a:endParaRPr lang="en-US"/>
           </a:p>
@@ -1751,7 +1751,7 @@
           <a:p>
             <a:fld id="{24E1524C-2386-4A77-AA3F-47DF77D98E67}" type="datetimeFigureOut">
               <a:rPr lang="en-US" smtClean="0"/>
-              <a:t>4/12/2025</a:t>
+              <a:t>4/13/2025</a:t>
             </a:fld>
             <a:endParaRPr lang="en-US"/>
           </a:p>
@@ -1929,7 +1929,7 @@
           <a:p>
             <a:fld id="{24E1524C-2386-4A77-AA3F-47DF77D98E67}" type="datetimeFigureOut">
               <a:rPr lang="en-US" smtClean="0"/>
-              <a:t>4/12/2025</a:t>
+              <a:t>4/13/2025</a:t>
             </a:fld>
             <a:endParaRPr lang="en-US"/>
           </a:p>
@@ -2102,7 +2102,7 @@
           <a:p>
             <a:fld id="{24E1524C-2386-4A77-AA3F-47DF77D98E67}" type="datetimeFigureOut">
               <a:rPr lang="en-US" smtClean="0"/>
-              <a:t>4/12/2025</a:t>
+              <a:t>4/13/2025</a:t>
             </a:fld>
             <a:endParaRPr lang="en-US"/>
           </a:p>
@@ -2347,7 +2347,7 @@
           <a:p>
             <a:fld id="{24E1524C-2386-4A77-AA3F-47DF77D98E67}" type="datetimeFigureOut">
               <a:rPr lang="en-US" smtClean="0"/>
-              <a:t>4/12/2025</a:t>
+              <a:t>4/13/2025</a:t>
             </a:fld>
             <a:endParaRPr lang="en-US"/>
           </a:p>
@@ -2632,7 +2632,7 @@
           <a:p>
             <a:fld id="{24E1524C-2386-4A77-AA3F-47DF77D98E67}" type="datetimeFigureOut">
               <a:rPr lang="en-US" smtClean="0"/>
-              <a:t>4/12/2025</a:t>
+              <a:t>4/13/2025</a:t>
             </a:fld>
             <a:endParaRPr lang="en-US"/>
           </a:p>
@@ -3051,7 +3051,7 @@
           <a:p>
             <a:fld id="{24E1524C-2386-4A77-AA3F-47DF77D98E67}" type="datetimeFigureOut">
               <a:rPr lang="en-US" smtClean="0"/>
-              <a:t>4/12/2025</a:t>
+              <a:t>4/13/2025</a:t>
             </a:fld>
             <a:endParaRPr lang="en-US"/>
           </a:p>
@@ -3168,7 +3168,7 @@
           <a:p>
             <a:fld id="{24E1524C-2386-4A77-AA3F-47DF77D98E67}" type="datetimeFigureOut">
               <a:rPr lang="en-US" smtClean="0"/>
-              <a:t>4/12/2025</a:t>
+              <a:t>4/13/2025</a:t>
             </a:fld>
             <a:endParaRPr lang="en-US"/>
           </a:p>
@@ -3263,7 +3263,7 @@
           <a:p>
             <a:fld id="{24E1524C-2386-4A77-AA3F-47DF77D98E67}" type="datetimeFigureOut">
               <a:rPr lang="en-US" smtClean="0"/>
-              <a:t>4/12/2025</a:t>
+              <a:t>4/13/2025</a:t>
             </a:fld>
             <a:endParaRPr lang="en-US"/>
           </a:p>
@@ -3538,7 +3538,7 @@
           <a:p>
             <a:fld id="{24E1524C-2386-4A77-AA3F-47DF77D98E67}" type="datetimeFigureOut">
               <a:rPr lang="en-US" smtClean="0"/>
-              <a:t>4/12/2025</a:t>
+              <a:t>4/13/2025</a:t>
             </a:fld>
             <a:endParaRPr lang="en-US"/>
           </a:p>
@@ -3790,7 +3790,7 @@
           <a:p>
             <a:fld id="{24E1524C-2386-4A77-AA3F-47DF77D98E67}" type="datetimeFigureOut">
               <a:rPr lang="en-US" smtClean="0"/>
-              <a:t>4/12/2025</a:t>
+              <a:t>4/13/2025</a:t>
             </a:fld>
             <a:endParaRPr lang="en-US"/>
           </a:p>
@@ -4001,7 +4001,7 @@
           <a:p>
             <a:fld id="{24E1524C-2386-4A77-AA3F-47DF77D98E67}" type="datetimeFigureOut">
               <a:rPr lang="en-US" smtClean="0"/>
-              <a:t>4/12/2025</a:t>
+              <a:t>4/13/2025</a:t>
             </a:fld>
             <a:endParaRPr lang="en-US"/>
           </a:p>
@@ -5816,53 +5816,6 @@
           </a:extLst>
         </p:spPr>
       </p:pic>
-      <p:pic>
-        <p:nvPicPr>
-          <p:cNvPr id="1028" name="Picture 4">
-            <a:extLst>
-              <a:ext uri="{FF2B5EF4-FFF2-40B4-BE49-F238E27FC236}">
-                <a16:creationId xmlns:a16="http://schemas.microsoft.com/office/drawing/2014/main" id="{8DF103DE-6389-BA7F-D188-D3E4AF826C43}"/>
-              </a:ext>
-            </a:extLst>
-          </p:cNvPr>
-          <p:cNvPicPr>
-            <a:picLocks noChangeAspect="1" noChangeArrowheads="1"/>
-          </p:cNvPicPr>
-          <p:nvPr/>
-        </p:nvPicPr>
-        <p:blipFill>
-          <a:blip r:embed="rId7">
-            <a:extLst>
-              <a:ext uri="{28A0092B-C50C-407E-A947-70E740481C1C}">
-                <a14:useLocalDpi xmlns:a14="http://schemas.microsoft.com/office/drawing/2010/main" val="0"/>
-              </a:ext>
-            </a:extLst>
-          </a:blip>
-          <a:srcRect/>
-          <a:stretch>
-            <a:fillRect/>
-          </a:stretch>
-        </p:blipFill>
-        <p:spPr bwMode="auto">
-          <a:xfrm>
-            <a:off x="1305626" y="27660600"/>
-            <a:ext cx="13777885" cy="3599031"/>
-          </a:xfrm>
-          <a:prstGeom prst="rect">
-            <a:avLst/>
-          </a:prstGeom>
-          <a:noFill/>
-          <a:extLst>
-            <a:ext uri="{909E8E84-426E-40DD-AFC4-6F175D3DCCD1}">
-              <a14:hiddenFill xmlns:a14="http://schemas.microsoft.com/office/drawing/2010/main">
-                <a:solidFill>
-                  <a:srgbClr val="FFFFFF"/>
-                </a:solidFill>
-              </a14:hiddenFill>
-            </a:ext>
-          </a:extLst>
-        </p:spPr>
-      </p:pic>
       <p:sp>
         <p:nvSpPr>
           <p:cNvPr id="4" name="TextBox 3">
@@ -6235,6 +6188,53 @@
           </a:p>
         </p:txBody>
       </p:sp>
+      <p:pic>
+        <p:nvPicPr>
+          <p:cNvPr id="10" name="Picture 2">
+            <a:extLst>
+              <a:ext uri="{FF2B5EF4-FFF2-40B4-BE49-F238E27FC236}">
+                <a16:creationId xmlns:a16="http://schemas.microsoft.com/office/drawing/2014/main" id="{346E2AB5-04DF-E41E-EBF3-1A6DFEC462DA}"/>
+              </a:ext>
+            </a:extLst>
+          </p:cNvPr>
+          <p:cNvPicPr>
+            <a:picLocks noChangeAspect="1" noChangeArrowheads="1"/>
+          </p:cNvPicPr>
+          <p:nvPr/>
+        </p:nvPicPr>
+        <p:blipFill>
+          <a:blip r:embed="rId7">
+            <a:extLst>
+              <a:ext uri="{28A0092B-C50C-407E-A947-70E740481C1C}">
+                <a14:useLocalDpi xmlns:a14="http://schemas.microsoft.com/office/drawing/2010/main" val="0"/>
+              </a:ext>
+            </a:extLst>
+          </a:blip>
+          <a:srcRect/>
+          <a:stretch>
+            <a:fillRect/>
+          </a:stretch>
+        </p:blipFill>
+        <p:spPr bwMode="auto">
+          <a:xfrm>
+            <a:off x="737142" y="28149712"/>
+            <a:ext cx="14824396" cy="2827088"/>
+          </a:xfrm>
+          <a:prstGeom prst="rect">
+            <a:avLst/>
+          </a:prstGeom>
+          <a:noFill/>
+          <a:extLst>
+            <a:ext uri="{909E8E84-426E-40DD-AFC4-6F175D3DCCD1}">
+              <a14:hiddenFill xmlns:a14="http://schemas.microsoft.com/office/drawing/2010/main">
+                <a:solidFill>
+                  <a:srgbClr val="FFFFFF"/>
+                </a:solidFill>
+              </a14:hiddenFill>
+            </a:ext>
+          </a:extLst>
+        </p:spPr>
+      </p:pic>
     </p:spTree>
     <p:extLst>
       <p:ext uri="{BB962C8B-B14F-4D97-AF65-F5344CB8AC3E}">
@@ -7159,15 +7159,6 @@
 </file>
 
 <file path=customXml/item2.xml><?xml version="1.0" encoding="utf-8"?>
-<?mso-contentType ?>
-<FormTemplates xmlns="http://schemas.microsoft.com/sharepoint/v3/contenttype/forms">
-  <Display>DocumentLibraryForm</Display>
-  <Edit>DocumentLibraryForm</Edit>
-  <New>DocumentLibraryForm</New>
-</FormTemplates>
-</file>
-
-<file path=customXml/item3.xml><?xml version="1.0" encoding="utf-8"?>
 <ct:contentTypeSchema xmlns:ct="http://schemas.microsoft.com/office/2006/metadata/contentType" xmlns:ma="http://schemas.microsoft.com/office/2006/metadata/properties/metaAttributes" ct:_="" ma:_="" ma:contentTypeName="Document" ma:contentTypeID="0x010100896936867FB4BD4CBBB1D9655E335B32" ma:contentTypeVersion="38" ma:contentTypeDescription="Create a new document." ma:contentTypeScope="" ma:versionID="361c3cd5f1c98f95f9d571e756a51304">
   <xsd:schema xmlns:xsd="http://www.w3.org/2001/XMLSchema" xmlns:xs="http://www.w3.org/2001/XMLSchema" xmlns:p="http://schemas.microsoft.com/office/2006/metadata/properties" xmlns:ns2="251e4a2b-1a33-4513-9017-f0bb34cca31e" xmlns:ns3="8380694e-df13-4765-9f36-450494b12df9" xmlns:ns4="e9952153-5aa5-42e8-8300-ccc6398e6c31" targetNamespace="http://schemas.microsoft.com/office/2006/metadata/properties" ma:root="true" ma:fieldsID="2a7a4d7a194afafab4501530be61863a" ns2:_="" ns3:_="" ns4:_="">
     <xsd:import namespace="251e4a2b-1a33-4513-9017-f0bb34cca31e"/>
@@ -7609,6 +7600,15 @@
 </ct:contentTypeSchema>
 </file>
 
+<file path=customXml/item3.xml><?xml version="1.0" encoding="utf-8"?>
+<?mso-contentType ?>
+<FormTemplates xmlns="http://schemas.microsoft.com/sharepoint/v3/contenttype/forms">
+  <Display>DocumentLibraryForm</Display>
+  <Edit>DocumentLibraryForm</Edit>
+  <New>DocumentLibraryForm</New>
+</FormTemplates>
+</file>
+
 <file path=customXml/itemProps1.xml><?xml version="1.0" encoding="utf-8"?>
 <ds:datastoreItem xmlns:ds="http://schemas.openxmlformats.org/officeDocument/2006/customXml" ds:itemID="{EA5F3152-1B22-4120-90AD-ABECC3E883B9}">
   <ds:schemaRefs>
@@ -7628,14 +7628,6 @@
 </file>
 
 <file path=customXml/itemProps2.xml><?xml version="1.0" encoding="utf-8"?>
-<ds:datastoreItem xmlns:ds="http://schemas.openxmlformats.org/officeDocument/2006/customXml" ds:itemID="{72B731D7-F5BF-4D0E-BEA0-A10CED407C8E}">
-  <ds:schemaRefs>
-    <ds:schemaRef ds:uri="http://schemas.microsoft.com/sharepoint/v3/contenttype/forms"/>
-  </ds:schemaRefs>
-</ds:datastoreItem>
-</file>
-
-<file path=customXml/itemProps3.xml><?xml version="1.0" encoding="utf-8"?>
 <ds:datastoreItem xmlns:ds="http://schemas.openxmlformats.org/officeDocument/2006/customXml" ds:itemID="{7717D36E-5DB5-4546-9539-BCB69F065F47}">
   <ds:schemaRefs>
     <ds:schemaRef ds:uri="http://schemas.microsoft.com/office/2006/metadata/contentType"/>
@@ -7653,4 +7645,12 @@
     <ds:schemaRef ds:uri="http://schemas.microsoft.com/internal/obd"/>
   </ds:schemaRefs>
 </ds:datastoreItem>
+</file>
+
+<file path=customXml/itemProps3.xml><?xml version="1.0" encoding="utf-8"?>
+<ds:datastoreItem xmlns:ds="http://schemas.openxmlformats.org/officeDocument/2006/customXml" ds:itemID="{72B731D7-F5BF-4D0E-BEA0-A10CED407C8E}">
+  <ds:schemaRefs>
+    <ds:schemaRef ds:uri="http://schemas.microsoft.com/sharepoint/v3/contenttype/forms"/>
+  </ds:schemaRefs>
+</ds:datastoreItem>
 </file>
--- a/Poster.pptx
+++ b/Poster.pptx
@@ -4935,8 +4935,8 @@
         </p:nvSpPr>
         <p:spPr>
           <a:xfrm>
-            <a:off x="1125943" y="20580143"/>
-            <a:ext cx="30039857" cy="847830"/>
+            <a:off x="1125943" y="16406971"/>
+            <a:ext cx="39869651" cy="939422"/>
           </a:xfrm>
           <a:prstGeom prst="rect">
             <a:avLst/>
@@ -5063,10 +5063,10 @@
       </p:sp>
       <p:cxnSp>
         <p:nvCxnSpPr>
-          <p:cNvPr id="23" name="Straight Connector 22">
+          <p:cNvPr id="24" name="Straight Connector 23">
             <a:extLst>
               <a:ext uri="{FF2B5EF4-FFF2-40B4-BE49-F238E27FC236}">
-                <a16:creationId xmlns:a16="http://schemas.microsoft.com/office/drawing/2014/main" id="{E9F3B06F-FE7F-0CB0-3C4F-04296AAE1503}"/>
+                <a16:creationId xmlns:a16="http://schemas.microsoft.com/office/drawing/2014/main" id="{8166469B-9C52-51F8-47E3-F642592D2947}"/>
               </a:ext>
             </a:extLst>
           </p:cNvPr>
@@ -5077,8 +5077,8 @@
         </p:nvCxnSpPr>
         <p:spPr>
           <a:xfrm>
-            <a:off x="1497287" y="20122943"/>
-            <a:ext cx="38945903" cy="0"/>
+            <a:off x="17907000" y="6549360"/>
+            <a:ext cx="0" cy="9071640"/>
           </a:xfrm>
           <a:prstGeom prst="line">
             <a:avLst/>
@@ -5104,52 +5104,758 @@
           </a:fontRef>
         </p:style>
       </p:cxnSp>
-      <p:cxnSp>
-        <p:nvCxnSpPr>
-          <p:cNvPr id="24" name="Straight Connector 23">
+      <p:sp>
+        <p:nvSpPr>
+          <p:cNvPr id="8" name="Rectangle 7">
             <a:extLst>
               <a:ext uri="{FF2B5EF4-FFF2-40B4-BE49-F238E27FC236}">
-                <a16:creationId xmlns:a16="http://schemas.microsoft.com/office/drawing/2014/main" id="{8166469B-9C52-51F8-47E3-F642592D2947}"/>
+                <a16:creationId xmlns:a16="http://schemas.microsoft.com/office/drawing/2014/main" id="{A0B1654C-0B11-4E5F-4EE1-EFE9DDD8E6AC}"/>
               </a:ext>
             </a:extLst>
           </p:cNvPr>
-          <p:cNvCxnSpPr>
-            <a:cxnSpLocks/>
-          </p:cNvCxnSpPr>
+          <p:cNvSpPr/>
           <p:nvPr/>
-        </p:nvCxnSpPr>
+        </p:nvSpPr>
         <p:spPr>
           <a:xfrm>
-            <a:off x="17907000" y="6549360"/>
-            <a:ext cx="0" cy="13573583"/>
+            <a:off x="0" y="0"/>
+            <a:ext cx="11887200" cy="2819400"/>
           </a:xfrm>
-          <a:prstGeom prst="line">
+          <a:prstGeom prst="rect">
             <a:avLst/>
           </a:prstGeom>
+          <a:solidFill>
+            <a:srgbClr val="C8102E"/>
+          </a:solidFill>
           <a:ln>
-            <a:solidFill>
-              <a:srgbClr val="C00000"/>
-            </a:solidFill>
+            <a:noFill/>
           </a:ln>
         </p:spPr>
         <p:style>
           <a:lnRef idx="2">
-            <a:schemeClr val="accent3"/>
+            <a:schemeClr val="accent1">
+              <a:shade val="15000"/>
+            </a:schemeClr>
           </a:lnRef>
-          <a:fillRef idx="0">
-            <a:schemeClr val="accent3"/>
+          <a:fillRef idx="1">
+            <a:schemeClr val="accent1"/>
           </a:fillRef>
-          <a:effectRef idx="1">
-            <a:schemeClr val="accent3"/>
+          <a:effectRef idx="0">
+            <a:schemeClr val="accent1"/>
           </a:effectRef>
           <a:fontRef idx="minor">
-            <a:schemeClr val="tx1"/>
+            <a:schemeClr val="lt1"/>
           </a:fontRef>
         </p:style>
-      </p:cxnSp>
-      <p:sp>
-        <p:nvSpPr>
-          <p:cNvPr id="26" name="Shape 72">
+        <p:txBody>
+          <a:bodyPr rtlCol="0" anchor="ctr"/>
+          <a:lstStyle/>
+          <a:p>
+            <a:pPr algn="ctr"/>
+            <a:endParaRPr lang="en-US" dirty="0"/>
+          </a:p>
+        </p:txBody>
+      </p:sp>
+      <p:sp>
+        <p:nvSpPr>
+          <p:cNvPr id="11" name="TextBox 10">
+            <a:extLst>
+              <a:ext uri="{FF2B5EF4-FFF2-40B4-BE49-F238E27FC236}">
+                <a16:creationId xmlns:a16="http://schemas.microsoft.com/office/drawing/2014/main" id="{87151A1B-7427-E648-AC14-54501F81AC67}"/>
+              </a:ext>
+            </a:extLst>
+          </p:cNvPr>
+          <p:cNvSpPr txBox="1"/>
+          <p:nvPr/>
+        </p:nvSpPr>
+        <p:spPr>
+          <a:xfrm>
+            <a:off x="762000" y="457200"/>
+            <a:ext cx="14865139" cy="1938992"/>
+          </a:xfrm>
+          <a:prstGeom prst="rect">
+            <a:avLst/>
+          </a:prstGeom>
+          <a:noFill/>
+        </p:spPr>
+        <p:txBody>
+          <a:bodyPr wrap="square" rtlCol="0">
+            <a:spAutoFit/>
+          </a:bodyPr>
+          <a:lstStyle/>
+          <a:p>
+            <a:r>
+              <a:rPr lang="en-US" sz="6000" dirty="0">
+                <a:solidFill>
+                  <a:schemeClr val="bg1"/>
+                </a:solidFill>
+                <a:latin typeface="Lato" panose="020F0502020204030203" pitchFamily="34" charset="0"/>
+                <a:ea typeface="Lato" panose="020F0502020204030203" pitchFamily="34" charset="0"/>
+                <a:cs typeface="Lato" panose="020F0502020204030203" pitchFamily="34" charset="0"/>
+              </a:rPr>
+              <a:t>Final Project</a:t>
+            </a:r>
+          </a:p>
+          <a:p>
+            <a:r>
+              <a:rPr lang="en-US" sz="6000" dirty="0">
+                <a:solidFill>
+                  <a:schemeClr val="bg1"/>
+                </a:solidFill>
+                <a:latin typeface="Lato" panose="020F0502020204030203" pitchFamily="34" charset="0"/>
+                <a:ea typeface="Lato" panose="020F0502020204030203" pitchFamily="34" charset="0"/>
+                <a:cs typeface="Lato" panose="020F0502020204030203" pitchFamily="34" charset="0"/>
+              </a:rPr>
+              <a:t>DS 4420 – Machine Learning 2</a:t>
+            </a:r>
+          </a:p>
+        </p:txBody>
+      </p:sp>
+      <p:sp>
+        <p:nvSpPr>
+          <p:cNvPr id="3" name="TextBox 2">
+            <a:extLst>
+              <a:ext uri="{FF2B5EF4-FFF2-40B4-BE49-F238E27FC236}">
+                <a16:creationId xmlns:a16="http://schemas.microsoft.com/office/drawing/2014/main" id="{E00857F7-2F89-0EB6-AB29-E92D1F7ABB2B}"/>
+              </a:ext>
+            </a:extLst>
+          </p:cNvPr>
+          <p:cNvSpPr txBox="1"/>
+          <p:nvPr/>
+        </p:nvSpPr>
+        <p:spPr>
+          <a:xfrm>
+            <a:off x="1519058" y="7584035"/>
+            <a:ext cx="15473538" cy="9571851"/>
+          </a:xfrm>
+          <a:prstGeom prst="rect">
+            <a:avLst/>
+          </a:prstGeom>
+          <a:noFill/>
+        </p:spPr>
+        <p:txBody>
+          <a:bodyPr wrap="square" rtlCol="0">
+            <a:spAutoFit/>
+          </a:bodyPr>
+          <a:lstStyle/>
+          <a:p>
+            <a:r>
+              <a:rPr lang="en-US" sz="4400" dirty="0"/>
+              <a:t>The purpose of this project is to utilize Multi-Layer Perceptron and Convolutional Neural Networks to predict wildfires and their severity.</a:t>
+            </a:r>
+          </a:p>
+          <a:p>
+            <a:endParaRPr lang="en-US" sz="4400" dirty="0"/>
+          </a:p>
+          <a:p>
+            <a:r>
+              <a:rPr lang="en-US" sz="4400" dirty="0"/>
+              <a:t>MLP uses structured forest fire data containing FWI indices, temporal data, and location to be trained and tested on. It attempts to predict the area of forest fire damage in log-scaled hectares.</a:t>
+            </a:r>
+          </a:p>
+          <a:p>
+            <a:endParaRPr lang="en-US" sz="4400" dirty="0"/>
+          </a:p>
+          <a:p>
+            <a:r>
+              <a:rPr lang="en-US" sz="4400" dirty="0"/>
+              <a:t>CNN uses RGB images of fire v. no-fire to be trained and tested on. It attempts to accurately predict whether an area will be impacted by fires or not.</a:t>
+            </a:r>
+          </a:p>
+          <a:p>
+            <a:endParaRPr lang="en-US" sz="4400" dirty="0"/>
+          </a:p>
+          <a:p>
+            <a:endParaRPr lang="en-US" sz="4400" dirty="0"/>
+          </a:p>
+        </p:txBody>
+      </p:sp>
+      <p:pic>
+        <p:nvPicPr>
+          <p:cNvPr id="12" name="Picture 11" descr="A large fire in the mountains&#10;&#10;AI-generated content may be incorrect.">
+            <a:extLst>
+              <a:ext uri="{FF2B5EF4-FFF2-40B4-BE49-F238E27FC236}">
+                <a16:creationId xmlns:a16="http://schemas.microsoft.com/office/drawing/2014/main" id="{CC5303F7-007C-A907-F701-6BF930784B18}"/>
+              </a:ext>
+            </a:extLst>
+          </p:cNvPr>
+          <p:cNvPicPr>
+            <a:picLocks noChangeAspect="1"/>
+          </p:cNvPicPr>
+          <p:nvPr/>
+        </p:nvPicPr>
+        <p:blipFill>
+          <a:blip r:embed="rId2" cstate="print">
+            <a:extLst>
+              <a:ext uri="{28A0092B-C50C-407E-A947-70E740481C1C}">
+                <a14:useLocalDpi xmlns:a14="http://schemas.microsoft.com/office/drawing/2010/main" val="0"/>
+              </a:ext>
+            </a:extLst>
+          </a:blip>
+          <a:stretch>
+            <a:fillRect/>
+          </a:stretch>
+        </p:blipFill>
+        <p:spPr>
+          <a:xfrm>
+            <a:off x="33975563" y="8310629"/>
+            <a:ext cx="7569728" cy="4900167"/>
+          </a:xfrm>
+          <a:prstGeom prst="rect">
+            <a:avLst/>
+          </a:prstGeom>
+        </p:spPr>
+      </p:pic>
+      <p:sp>
+        <p:nvSpPr>
+          <p:cNvPr id="25" name="TextBox 24">
+            <a:extLst>
+              <a:ext uri="{FF2B5EF4-FFF2-40B4-BE49-F238E27FC236}">
+                <a16:creationId xmlns:a16="http://schemas.microsoft.com/office/drawing/2014/main" id="{3F69E898-CB58-787D-3FE7-C1A472AC79CC}"/>
+              </a:ext>
+            </a:extLst>
+          </p:cNvPr>
+          <p:cNvSpPr txBox="1"/>
+          <p:nvPr/>
+        </p:nvSpPr>
+        <p:spPr>
+          <a:xfrm>
+            <a:off x="34006043" y="13468065"/>
+            <a:ext cx="6709537" cy="954107"/>
+          </a:xfrm>
+          <a:prstGeom prst="rect">
+            <a:avLst/>
+          </a:prstGeom>
+          <a:noFill/>
+        </p:spPr>
+        <p:txBody>
+          <a:bodyPr wrap="square">
+            <a:spAutoFit/>
+          </a:bodyPr>
+          <a:lstStyle/>
+          <a:p>
+            <a:r>
+              <a:rPr lang="en-US" sz="2800" b="0" dirty="0">
+                <a:effectLst/>
+                <a:latin typeface="Lato" panose="020F0502020204030203" pitchFamily="34" charset="0"/>
+                <a:ea typeface="Lato" panose="020F0502020204030203" pitchFamily="34" charset="0"/>
+                <a:cs typeface="Lato" panose="020F0502020204030203" pitchFamily="34" charset="0"/>
+              </a:rPr>
+              <a:t>Figure 1. A “fire image from ”The Wildfire Dataset” [2]. </a:t>
+            </a:r>
+            <a:endParaRPr lang="en-US" sz="2800" dirty="0"/>
+          </a:p>
+        </p:txBody>
+      </p:sp>
+      <p:pic>
+        <p:nvPicPr>
+          <p:cNvPr id="1026" name="Picture 2">
+            <a:extLst>
+              <a:ext uri="{FF2B5EF4-FFF2-40B4-BE49-F238E27FC236}">
+                <a16:creationId xmlns:a16="http://schemas.microsoft.com/office/drawing/2014/main" id="{ADAA3AD7-054A-0537-9858-F157E5B95B94}"/>
+              </a:ext>
+            </a:extLst>
+          </p:cNvPr>
+          <p:cNvPicPr>
+            <a:picLocks noChangeAspect="1" noChangeArrowheads="1"/>
+          </p:cNvPicPr>
+          <p:nvPr/>
+        </p:nvPicPr>
+        <p:blipFill>
+          <a:blip r:embed="rId3">
+            <a:extLst>
+              <a:ext uri="{28A0092B-C50C-407E-A947-70E740481C1C}">
+                <a14:useLocalDpi xmlns:a14="http://schemas.microsoft.com/office/drawing/2010/main" val="0"/>
+              </a:ext>
+            </a:extLst>
+          </a:blip>
+          <a:srcRect/>
+          <a:stretch>
+            <a:fillRect/>
+          </a:stretch>
+        </p:blipFill>
+        <p:spPr bwMode="auto">
+          <a:xfrm>
+            <a:off x="18090127" y="17718898"/>
+            <a:ext cx="15228016" cy="6271795"/>
+          </a:xfrm>
+          <a:prstGeom prst="rect">
+            <a:avLst/>
+          </a:prstGeom>
+          <a:noFill/>
+          <a:extLst>
+            <a:ext uri="{909E8E84-426E-40DD-AFC4-6F175D3DCCD1}">
+              <a14:hiddenFill xmlns:a14="http://schemas.microsoft.com/office/drawing/2010/main">
+                <a:solidFill>
+                  <a:srgbClr val="FFFFFF"/>
+                </a:solidFill>
+              </a14:hiddenFill>
+            </a:ext>
+          </a:extLst>
+        </p:spPr>
+      </p:pic>
+      <p:sp>
+        <p:nvSpPr>
+          <p:cNvPr id="4" name="TextBox 3">
+            <a:extLst>
+              <a:ext uri="{FF2B5EF4-FFF2-40B4-BE49-F238E27FC236}">
+                <a16:creationId xmlns:a16="http://schemas.microsoft.com/office/drawing/2014/main" id="{2A3E5D3C-D891-4D10-9A1C-BAF66B5506DC}"/>
+              </a:ext>
+            </a:extLst>
+          </p:cNvPr>
+          <p:cNvSpPr txBox="1"/>
+          <p:nvPr/>
+        </p:nvSpPr>
+        <p:spPr>
+          <a:xfrm>
+            <a:off x="18778030" y="7577134"/>
+            <a:ext cx="15228013" cy="8463855"/>
+          </a:xfrm>
+          <a:prstGeom prst="rect">
+            <a:avLst/>
+          </a:prstGeom>
+          <a:noFill/>
+        </p:spPr>
+        <p:txBody>
+          <a:bodyPr wrap="square">
+            <a:spAutoFit/>
+          </a:bodyPr>
+          <a:lstStyle/>
+          <a:p>
+            <a:pPr>
+              <a:buNone/>
+            </a:pPr>
+            <a:r>
+              <a:rPr lang="en-US" sz="4800" b="1" dirty="0"/>
+              <a:t>Multilayer Perceptron (MLP):</a:t>
+            </a:r>
+            <a:endParaRPr lang="en-US" sz="4800" dirty="0"/>
+          </a:p>
+          <a:p>
+            <a:pPr marL="685800" indent="-685800">
+              <a:buFontTx/>
+              <a:buChar char="-"/>
+            </a:pPr>
+            <a:r>
+              <a:rPr lang="en-US" sz="4000" dirty="0"/>
+              <a:t>Two hidden layers with Leaky </a:t>
+            </a:r>
+            <a:r>
+              <a:rPr lang="en-US" sz="4000" dirty="0" err="1"/>
+              <a:t>ReLU</a:t>
+            </a:r>
+            <a:r>
+              <a:rPr lang="en-US" sz="4000" dirty="0"/>
+              <a:t>, L2 regularization, and batch normalization for stability and generalization.</a:t>
+            </a:r>
+          </a:p>
+          <a:p>
+            <a:pPr marL="685800" indent="-685800">
+              <a:buFontTx/>
+              <a:buChar char="-"/>
+            </a:pPr>
+            <a:r>
+              <a:rPr lang="en-US" sz="4000" dirty="0"/>
+              <a:t>Trained using backpropagation and evaluated with MAE, RMSE, R², and MSE.</a:t>
+            </a:r>
+          </a:p>
+          <a:p>
+            <a:endParaRPr lang="en-US" sz="4800" dirty="0"/>
+          </a:p>
+          <a:p>
+            <a:pPr>
+              <a:buNone/>
+            </a:pPr>
+            <a:r>
+              <a:rPr lang="en-US" sz="4800" b="1" dirty="0"/>
+              <a:t>Convolutional Neural Network (CNN):</a:t>
+            </a:r>
+            <a:endParaRPr lang="en-US" sz="4800" dirty="0"/>
+          </a:p>
+          <a:p>
+            <a:pPr marL="685800" indent="-685800">
+              <a:buFontTx/>
+              <a:buChar char="-"/>
+            </a:pPr>
+            <a:r>
+              <a:rPr lang="en-US" sz="4000" dirty="0"/>
+              <a:t>Classifies 32x32 RGB images into fire vs. no fire using two convolutional layers (32 &amp; 64 filters)</a:t>
+            </a:r>
+          </a:p>
+          <a:p>
+            <a:pPr marL="685800" indent="-685800">
+              <a:buFontTx/>
+              <a:buChar char="-"/>
+            </a:pPr>
+            <a:r>
+              <a:rPr lang="en-US" sz="4000" dirty="0"/>
+              <a:t>Uses batch normalization, max pooling, and a dense layer for feature extraction and classification</a:t>
+            </a:r>
+          </a:p>
+          <a:p>
+            <a:pPr marL="685800" indent="-685800">
+              <a:buFontTx/>
+              <a:buChar char="-"/>
+            </a:pPr>
+            <a:r>
+              <a:rPr lang="en-US" sz="4000" dirty="0"/>
+              <a:t>Final sigmoid-activated layer outputs binary probabilities; quantified with binary cross-entropy loss (for sigmoid)</a:t>
+            </a:r>
+          </a:p>
+        </p:txBody>
+      </p:sp>
+      <p:sp>
+        <p:nvSpPr>
+          <p:cNvPr id="18" name="TextBox 17">
+            <a:extLst>
+              <a:ext uri="{FF2B5EF4-FFF2-40B4-BE49-F238E27FC236}">
+                <a16:creationId xmlns:a16="http://schemas.microsoft.com/office/drawing/2014/main" id="{352B7B01-8886-399B-CB16-AC08F4FCEEB8}"/>
+              </a:ext>
+            </a:extLst>
+          </p:cNvPr>
+          <p:cNvSpPr txBox="1"/>
+          <p:nvPr/>
+        </p:nvSpPr>
+        <p:spPr>
+          <a:xfrm>
+            <a:off x="18675876" y="25602877"/>
+            <a:ext cx="22869415" cy="4524315"/>
+          </a:xfrm>
+          <a:prstGeom prst="rect">
+            <a:avLst/>
+          </a:prstGeom>
+          <a:noFill/>
+        </p:spPr>
+        <p:txBody>
+          <a:bodyPr wrap="square">
+            <a:spAutoFit/>
+          </a:bodyPr>
+          <a:lstStyle/>
+          <a:p>
+            <a:r>
+              <a:rPr lang="en-US" sz="4800" b="1" dirty="0"/>
+              <a:t>CNN Model:</a:t>
+            </a:r>
+            <a:r>
+              <a:rPr lang="en-US" sz="4800" dirty="0"/>
+              <a:t> Achieved 82.14% validation accuracy, with moderate overfitting indicated by rising validation loss. Despite regularization the model misclassified some samples (82 false positives, 63 false negatives), suggesting potential gains from data augmentation or architecture tuning.</a:t>
+            </a:r>
+            <a:br>
+              <a:rPr lang="en-US" sz="4800" dirty="0"/>
+            </a:br>
+            <a:br>
+              <a:rPr lang="en-US" sz="4800" dirty="0"/>
+            </a:br>
+            <a:endParaRPr lang="en-US" sz="4800" dirty="0"/>
+          </a:p>
+        </p:txBody>
+      </p:sp>
+      <p:sp>
+        <p:nvSpPr>
+          <p:cNvPr id="21" name="TextBox 20">
+            <a:extLst>
+              <a:ext uri="{FF2B5EF4-FFF2-40B4-BE49-F238E27FC236}">
+                <a16:creationId xmlns:a16="http://schemas.microsoft.com/office/drawing/2014/main" id="{97EC9A8A-DEDC-E50D-B03A-D639C7B5E8B5}"/>
+              </a:ext>
+            </a:extLst>
+          </p:cNvPr>
+          <p:cNvSpPr txBox="1"/>
+          <p:nvPr/>
+        </p:nvSpPr>
+        <p:spPr>
+          <a:xfrm>
+            <a:off x="1519058" y="18027913"/>
+            <a:ext cx="15228016" cy="3785652"/>
+          </a:xfrm>
+          <a:prstGeom prst="rect">
+            <a:avLst/>
+          </a:prstGeom>
+          <a:noFill/>
+        </p:spPr>
+        <p:txBody>
+          <a:bodyPr wrap="square">
+            <a:spAutoFit/>
+          </a:bodyPr>
+          <a:lstStyle/>
+          <a:p>
+            <a:r>
+              <a:rPr lang="en-US" sz="4800" b="1" dirty="0"/>
+              <a:t>MLP Model:</a:t>
+            </a:r>
+            <a:r>
+              <a:rPr lang="en-US" sz="4800" dirty="0"/>
+              <a:t> Demonstrated strong learning on training data  but failed to generalize (test R² ≈ 0), indicating overfitting and architectural mismatch for the dataset size and quality. Additional regularization and improved feature engineering are needed for better test performance.</a:t>
+            </a:r>
+          </a:p>
+        </p:txBody>
+      </p:sp>
+      <p:sp>
+        <p:nvSpPr>
+          <p:cNvPr id="22" name="TextBox 21">
+            <a:extLst>
+              <a:ext uri="{FF2B5EF4-FFF2-40B4-BE49-F238E27FC236}">
+                <a16:creationId xmlns:a16="http://schemas.microsoft.com/office/drawing/2014/main" id="{77821EE0-FE8F-E5C8-85AA-2D95F27B9095}"/>
+              </a:ext>
+            </a:extLst>
+          </p:cNvPr>
+          <p:cNvSpPr txBox="1"/>
+          <p:nvPr/>
+        </p:nvSpPr>
+        <p:spPr>
+          <a:xfrm>
+            <a:off x="18675876" y="23916638"/>
+            <a:ext cx="13777885" cy="523220"/>
+          </a:xfrm>
+          <a:prstGeom prst="rect">
+            <a:avLst/>
+          </a:prstGeom>
+          <a:noFill/>
+        </p:spPr>
+        <p:txBody>
+          <a:bodyPr wrap="square">
+            <a:spAutoFit/>
+          </a:bodyPr>
+          <a:lstStyle/>
+          <a:p>
+            <a:r>
+              <a:rPr lang="en-US" sz="2800" b="0" dirty="0">
+                <a:effectLst/>
+                <a:latin typeface="Lato" panose="020F0502020204030203" pitchFamily="34" charset="0"/>
+                <a:ea typeface="Lato" panose="020F0502020204030203" pitchFamily="34" charset="0"/>
+                <a:cs typeface="Lato" panose="020F0502020204030203" pitchFamily="34" charset="0"/>
+              </a:rPr>
+              <a:t>Figure 3 + 4: Accuracy and loss over epochs for training and validation sets for CNN.</a:t>
+            </a:r>
+            <a:endParaRPr lang="en-US" sz="2800" dirty="0"/>
+          </a:p>
+        </p:txBody>
+      </p:sp>
+      <p:sp>
+        <p:nvSpPr>
+          <p:cNvPr id="27" name="TextBox 26">
+            <a:extLst>
+              <a:ext uri="{FF2B5EF4-FFF2-40B4-BE49-F238E27FC236}">
+                <a16:creationId xmlns:a16="http://schemas.microsoft.com/office/drawing/2014/main" id="{720671EE-D73E-6A6A-68B2-92DBFCC5DBE6}"/>
+              </a:ext>
+            </a:extLst>
+          </p:cNvPr>
+          <p:cNvSpPr txBox="1"/>
+          <p:nvPr/>
+        </p:nvSpPr>
+        <p:spPr>
+          <a:xfrm>
+            <a:off x="782371" y="31981647"/>
+            <a:ext cx="13777885" cy="523220"/>
+          </a:xfrm>
+          <a:prstGeom prst="rect">
+            <a:avLst/>
+          </a:prstGeom>
+          <a:noFill/>
+        </p:spPr>
+        <p:txBody>
+          <a:bodyPr wrap="square">
+            <a:spAutoFit/>
+          </a:bodyPr>
+          <a:lstStyle/>
+          <a:p>
+            <a:r>
+              <a:rPr lang="en-US" sz="2800" b="0" dirty="0">
+                <a:effectLst/>
+                <a:latin typeface="Lato" panose="020F0502020204030203" pitchFamily="34" charset="0"/>
+                <a:ea typeface="Lato" panose="020F0502020204030203" pitchFamily="34" charset="0"/>
+                <a:cs typeface="Lato" panose="020F0502020204030203" pitchFamily="34" charset="0"/>
+              </a:rPr>
+              <a:t>Figure </a:t>
+            </a:r>
+            <a:r>
+              <a:rPr lang="en-US" sz="2800" dirty="0">
+                <a:latin typeface="Lato" panose="020F0502020204030203" pitchFamily="34" charset="0"/>
+                <a:ea typeface="Lato" panose="020F0502020204030203" pitchFamily="34" charset="0"/>
+                <a:cs typeface="Lato" panose="020F0502020204030203" pitchFamily="34" charset="0"/>
+              </a:rPr>
+              <a:t>7: </a:t>
+            </a:r>
+            <a:r>
+              <a:rPr lang="en-US" sz="2800" b="0" dirty="0">
+                <a:effectLst/>
+                <a:latin typeface="Lato" panose="020F0502020204030203" pitchFamily="34" charset="0"/>
+                <a:ea typeface="Lato" panose="020F0502020204030203" pitchFamily="34" charset="0"/>
+                <a:cs typeface="Lato" panose="020F0502020204030203" pitchFamily="34" charset="0"/>
+              </a:rPr>
+              <a:t>MLP metrics containing loss for training and testing sets and R^2 value.</a:t>
+            </a:r>
+            <a:endParaRPr lang="en-US" sz="2800" dirty="0"/>
+          </a:p>
+        </p:txBody>
+      </p:sp>
+      <p:pic>
+        <p:nvPicPr>
+          <p:cNvPr id="10" name="Picture 2">
+            <a:extLst>
+              <a:ext uri="{FF2B5EF4-FFF2-40B4-BE49-F238E27FC236}">
+                <a16:creationId xmlns:a16="http://schemas.microsoft.com/office/drawing/2014/main" id="{346E2AB5-04DF-E41E-EBF3-1A6DFEC462DA}"/>
+              </a:ext>
+            </a:extLst>
+          </p:cNvPr>
+          <p:cNvPicPr>
+            <a:picLocks noChangeAspect="1" noChangeArrowheads="1"/>
+          </p:cNvPicPr>
+          <p:nvPr/>
+        </p:nvPicPr>
+        <p:blipFill>
+          <a:blip r:embed="rId4">
+            <a:extLst>
+              <a:ext uri="{28A0092B-C50C-407E-A947-70E740481C1C}">
+                <a14:useLocalDpi xmlns:a14="http://schemas.microsoft.com/office/drawing/2010/main" val="0"/>
+              </a:ext>
+            </a:extLst>
+          </a:blip>
+          <a:srcRect/>
+          <a:stretch>
+            <a:fillRect/>
+          </a:stretch>
+        </p:blipFill>
+        <p:spPr bwMode="auto">
+          <a:xfrm>
+            <a:off x="782371" y="29154559"/>
+            <a:ext cx="14824396" cy="2827088"/>
+          </a:xfrm>
+          <a:prstGeom prst="rect">
+            <a:avLst/>
+          </a:prstGeom>
+          <a:noFill/>
+          <a:extLst>
+            <a:ext uri="{909E8E84-426E-40DD-AFC4-6F175D3DCCD1}">
+              <a14:hiddenFill xmlns:a14="http://schemas.microsoft.com/office/drawing/2010/main">
+                <a:solidFill>
+                  <a:srgbClr val="FFFFFF"/>
+                </a:solidFill>
+              </a14:hiddenFill>
+            </a:ext>
+          </a:extLst>
+        </p:spPr>
+      </p:pic>
+      <p:pic>
+        <p:nvPicPr>
+          <p:cNvPr id="13" name="Picture 4">
+            <a:extLst>
+              <a:ext uri="{FF2B5EF4-FFF2-40B4-BE49-F238E27FC236}">
+                <a16:creationId xmlns:a16="http://schemas.microsoft.com/office/drawing/2014/main" id="{38563B9D-96A0-EF8B-9B22-60700AE826FA}"/>
+              </a:ext>
+            </a:extLst>
+          </p:cNvPr>
+          <p:cNvPicPr>
+            <a:picLocks noChangeAspect="1" noChangeArrowheads="1"/>
+          </p:cNvPicPr>
+          <p:nvPr/>
+        </p:nvPicPr>
+        <p:blipFill>
+          <a:blip r:embed="rId5">
+            <a:extLst>
+              <a:ext uri="{28A0092B-C50C-407E-A947-70E740481C1C}">
+                <a14:useLocalDpi xmlns:a14="http://schemas.microsoft.com/office/drawing/2010/main" val="0"/>
+              </a:ext>
+            </a:extLst>
+          </a:blip>
+          <a:srcRect/>
+          <a:stretch>
+            <a:fillRect/>
+          </a:stretch>
+        </p:blipFill>
+        <p:spPr bwMode="auto">
+          <a:xfrm>
+            <a:off x="33318143" y="17903743"/>
+            <a:ext cx="8085336" cy="6893567"/>
+          </a:xfrm>
+          <a:prstGeom prst="rect">
+            <a:avLst/>
+          </a:prstGeom>
+          <a:noFill/>
+          <a:extLst>
+            <a:ext uri="{909E8E84-426E-40DD-AFC4-6F175D3DCCD1}">
+              <a14:hiddenFill xmlns:a14="http://schemas.microsoft.com/office/drawing/2010/main">
+                <a:solidFill>
+                  <a:srgbClr val="FFFFFF"/>
+                </a:solidFill>
+              </a14:hiddenFill>
+            </a:ext>
+          </a:extLst>
+        </p:spPr>
+      </p:pic>
+      <p:sp>
+        <p:nvSpPr>
+          <p:cNvPr id="19" name="TextBox 18">
+            <a:extLst>
+              <a:ext uri="{FF2B5EF4-FFF2-40B4-BE49-F238E27FC236}">
+                <a16:creationId xmlns:a16="http://schemas.microsoft.com/office/drawing/2014/main" id="{978A5728-B86C-B7D9-A2E7-9DE45F5B85B2}"/>
+              </a:ext>
+            </a:extLst>
+          </p:cNvPr>
+          <p:cNvSpPr txBox="1"/>
+          <p:nvPr/>
+        </p:nvSpPr>
+        <p:spPr>
+          <a:xfrm>
+            <a:off x="33318143" y="24964377"/>
+            <a:ext cx="9352247" cy="523220"/>
+          </a:xfrm>
+          <a:prstGeom prst="rect">
+            <a:avLst/>
+          </a:prstGeom>
+          <a:noFill/>
+        </p:spPr>
+        <p:txBody>
+          <a:bodyPr wrap="square">
+            <a:spAutoFit/>
+          </a:bodyPr>
+          <a:lstStyle/>
+          <a:p>
+            <a:r>
+              <a:rPr lang="en-US" sz="2800" b="0" dirty="0">
+                <a:effectLst/>
+                <a:latin typeface="Lato" panose="020F0502020204030203" pitchFamily="34" charset="0"/>
+                <a:ea typeface="Lato" panose="020F0502020204030203" pitchFamily="34" charset="0"/>
+                <a:cs typeface="Lato" panose="020F0502020204030203" pitchFamily="34" charset="0"/>
+              </a:rPr>
+              <a:t>Figure 5: Confusion Matrix of the CNN model.</a:t>
+            </a:r>
+            <a:endParaRPr lang="en-US" sz="2800" dirty="0"/>
+          </a:p>
+        </p:txBody>
+      </p:sp>
+      <p:pic>
+        <p:nvPicPr>
+          <p:cNvPr id="37" name="Picture 36">
+            <a:extLst>
+              <a:ext uri="{FF2B5EF4-FFF2-40B4-BE49-F238E27FC236}">
+                <a16:creationId xmlns:a16="http://schemas.microsoft.com/office/drawing/2014/main" id="{6D28BCB0-B962-3208-3CCA-A533333549EB}"/>
+              </a:ext>
+            </a:extLst>
+          </p:cNvPr>
+          <p:cNvPicPr>
+            <a:picLocks noChangeAspect="1"/>
+          </p:cNvPicPr>
+          <p:nvPr/>
+        </p:nvPicPr>
+        <p:blipFill>
+          <a:blip r:embed="rId6"/>
+          <a:stretch>
+            <a:fillRect/>
+          </a:stretch>
+        </p:blipFill>
+        <p:spPr>
+          <a:xfrm>
+            <a:off x="762000" y="22667535"/>
+            <a:ext cx="8128497" cy="4992364"/>
+          </a:xfrm>
+          <a:prstGeom prst="rect">
+            <a:avLst/>
+          </a:prstGeom>
+        </p:spPr>
+      </p:pic>
+      <p:sp>
+        <p:nvSpPr>
+          <p:cNvPr id="38" name="Shape 72">
             <a:extLst>
               <a:ext uri="{FF2B5EF4-FFF2-40B4-BE49-F238E27FC236}">
                 <a16:creationId xmlns:a16="http://schemas.microsoft.com/office/drawing/2014/main" id="{19420BAE-4E55-C38C-DD05-2BFC89B55817}"/>
@@ -5161,8 +5867,8 @@
         </p:nvSpPr>
         <p:spPr>
           <a:xfrm>
-            <a:off x="31676596" y="20606764"/>
-            <a:ext cx="8978538" cy="768257"/>
+            <a:off x="18778030" y="29481558"/>
+            <a:ext cx="22319718" cy="854715"/>
           </a:xfrm>
           <a:prstGeom prst="rect">
             <a:avLst/>
@@ -5289,173 +5995,7 @@
       </p:sp>
       <p:sp>
         <p:nvSpPr>
-          <p:cNvPr id="8" name="Rectangle 7">
-            <a:extLst>
-              <a:ext uri="{FF2B5EF4-FFF2-40B4-BE49-F238E27FC236}">
-                <a16:creationId xmlns:a16="http://schemas.microsoft.com/office/drawing/2014/main" id="{A0B1654C-0B11-4E5F-4EE1-EFE9DDD8E6AC}"/>
-              </a:ext>
-            </a:extLst>
-          </p:cNvPr>
-          <p:cNvSpPr/>
-          <p:nvPr/>
-        </p:nvSpPr>
-        <p:spPr>
-          <a:xfrm>
-            <a:off x="0" y="0"/>
-            <a:ext cx="11887200" cy="2819400"/>
-          </a:xfrm>
-          <a:prstGeom prst="rect">
-            <a:avLst/>
-          </a:prstGeom>
-          <a:solidFill>
-            <a:srgbClr val="C8102E"/>
-          </a:solidFill>
-          <a:ln>
-            <a:noFill/>
-          </a:ln>
-        </p:spPr>
-        <p:style>
-          <a:lnRef idx="2">
-            <a:schemeClr val="accent1">
-              <a:shade val="15000"/>
-            </a:schemeClr>
-          </a:lnRef>
-          <a:fillRef idx="1">
-            <a:schemeClr val="accent1"/>
-          </a:fillRef>
-          <a:effectRef idx="0">
-            <a:schemeClr val="accent1"/>
-          </a:effectRef>
-          <a:fontRef idx="minor">
-            <a:schemeClr val="lt1"/>
-          </a:fontRef>
-        </p:style>
-        <p:txBody>
-          <a:bodyPr rtlCol="0" anchor="ctr"/>
-          <a:lstStyle/>
-          <a:p>
-            <a:pPr algn="ctr"/>
-            <a:endParaRPr lang="en-US" dirty="0"/>
-          </a:p>
-        </p:txBody>
-      </p:sp>
-      <p:sp>
-        <p:nvSpPr>
-          <p:cNvPr id="11" name="TextBox 10">
-            <a:extLst>
-              <a:ext uri="{FF2B5EF4-FFF2-40B4-BE49-F238E27FC236}">
-                <a16:creationId xmlns:a16="http://schemas.microsoft.com/office/drawing/2014/main" id="{87151A1B-7427-E648-AC14-54501F81AC67}"/>
-              </a:ext>
-            </a:extLst>
-          </p:cNvPr>
-          <p:cNvSpPr txBox="1"/>
-          <p:nvPr/>
-        </p:nvSpPr>
-        <p:spPr>
-          <a:xfrm>
-            <a:off x="762000" y="457200"/>
-            <a:ext cx="14865139" cy="1938992"/>
-          </a:xfrm>
-          <a:prstGeom prst="rect">
-            <a:avLst/>
-          </a:prstGeom>
-          <a:noFill/>
-        </p:spPr>
-        <p:txBody>
-          <a:bodyPr wrap="square" rtlCol="0">
-            <a:spAutoFit/>
-          </a:bodyPr>
-          <a:lstStyle/>
-          <a:p>
-            <a:r>
-              <a:rPr lang="en-US" sz="6000" dirty="0">
-                <a:solidFill>
-                  <a:schemeClr val="bg1"/>
-                </a:solidFill>
-                <a:latin typeface="Lato" panose="020F0502020204030203" pitchFamily="34" charset="0"/>
-                <a:ea typeface="Lato" panose="020F0502020204030203" pitchFamily="34" charset="0"/>
-                <a:cs typeface="Lato" panose="020F0502020204030203" pitchFamily="34" charset="0"/>
-              </a:rPr>
-              <a:t>Final Project</a:t>
-            </a:r>
-          </a:p>
-          <a:p>
-            <a:r>
-              <a:rPr lang="en-US" sz="6000" dirty="0">
-                <a:solidFill>
-                  <a:schemeClr val="bg1"/>
-                </a:solidFill>
-                <a:latin typeface="Lato" panose="020F0502020204030203" pitchFamily="34" charset="0"/>
-                <a:ea typeface="Lato" panose="020F0502020204030203" pitchFamily="34" charset="0"/>
-                <a:cs typeface="Lato" panose="020F0502020204030203" pitchFamily="34" charset="0"/>
-              </a:rPr>
-              <a:t>DS 4420 – Machine Learning 2</a:t>
-            </a:r>
-          </a:p>
-        </p:txBody>
-      </p:sp>
-      <p:sp>
-        <p:nvSpPr>
-          <p:cNvPr id="3" name="TextBox 2">
-            <a:extLst>
-              <a:ext uri="{FF2B5EF4-FFF2-40B4-BE49-F238E27FC236}">
-                <a16:creationId xmlns:a16="http://schemas.microsoft.com/office/drawing/2014/main" id="{E00857F7-2F89-0EB6-AB29-E92D1F7ABB2B}"/>
-              </a:ext>
-            </a:extLst>
-          </p:cNvPr>
-          <p:cNvSpPr txBox="1"/>
-          <p:nvPr/>
-        </p:nvSpPr>
-        <p:spPr>
-          <a:xfrm>
-            <a:off x="1519058" y="7584035"/>
-            <a:ext cx="15473538" cy="11726287"/>
-          </a:xfrm>
-          <a:prstGeom prst="rect">
-            <a:avLst/>
-          </a:prstGeom>
-          <a:noFill/>
-        </p:spPr>
-        <p:txBody>
-          <a:bodyPr wrap="square" rtlCol="0">
-            <a:spAutoFit/>
-          </a:bodyPr>
-          <a:lstStyle/>
-          <a:p>
-            <a:r>
-              <a:rPr lang="en-US" sz="5400" dirty="0"/>
-              <a:t>The purpose of this project is to utilize Multi-Layer Perceptron and Convolutional Neural Networks to predict wildfires and their severity.</a:t>
-            </a:r>
-          </a:p>
-          <a:p>
-            <a:endParaRPr lang="en-US" sz="5400" dirty="0"/>
-          </a:p>
-          <a:p>
-            <a:r>
-              <a:rPr lang="en-US" sz="5400" dirty="0"/>
-              <a:t>MLP uses structured forest fire data containing FWI indices, temporal data, and location to be trained and tested on. It attempts to predict the area of forest fire damage in hectares.</a:t>
-            </a:r>
-          </a:p>
-          <a:p>
-            <a:endParaRPr lang="en-US" sz="5400" dirty="0"/>
-          </a:p>
-          <a:p>
-            <a:r>
-              <a:rPr lang="en-US" sz="5400" dirty="0"/>
-              <a:t>CNN uses RGB images of fire v. no-fire to be trained and tested on. It attempts to accurately predict whether an area will be impacted by fires or not.</a:t>
-            </a:r>
-          </a:p>
-          <a:p>
-            <a:endParaRPr lang="en-US" sz="5400" dirty="0"/>
-          </a:p>
-          <a:p>
-            <a:endParaRPr lang="en-US" sz="5400" dirty="0"/>
-          </a:p>
-        </p:txBody>
-      </p:sp>
-      <p:sp>
-        <p:nvSpPr>
-          <p:cNvPr id="5" name="TextBox 4">
+          <p:cNvPr id="39" name="TextBox 38">
             <a:extLst>
               <a:ext uri="{FF2B5EF4-FFF2-40B4-BE49-F238E27FC236}">
                 <a16:creationId xmlns:a16="http://schemas.microsoft.com/office/drawing/2014/main" id="{7DFE87DC-0C30-5AB4-66C0-A8502F8784FB}"/>
@@ -5467,8 +6007,8 @@
         </p:nvSpPr>
         <p:spPr>
           <a:xfrm>
-            <a:off x="31691835" y="21858841"/>
-            <a:ext cx="8978537" cy="10433625"/>
+            <a:off x="18675876" y="30594142"/>
+            <a:ext cx="22217565" cy="2554545"/>
           </a:xfrm>
           <a:prstGeom prst="rect">
             <a:avLst/>
@@ -5485,7 +6025,7 @@
               <a:buNone/>
             </a:pPr>
             <a:r>
-              <a:rPr lang="en-US" sz="3200" dirty="0">
+              <a:rPr lang="en-US" sz="1600" dirty="0">
                 <a:latin typeface="Lato" panose="020F0502020204030203" pitchFamily="34" charset="0"/>
                 <a:ea typeface="Lato" panose="020F0502020204030203" pitchFamily="34" charset="0"/>
                 <a:cs typeface="Lato" panose="020F0502020204030203" pitchFamily="34" charset="0"/>
@@ -5493,7 +6033,7 @@
               <a:t>[1] </a:t>
             </a:r>
             <a:r>
-              <a:rPr lang="en-US" sz="3200" b="0" i="0" strike="noStrike" dirty="0">
+              <a:rPr lang="en-US" sz="1600" b="0" i="0" strike="noStrike" dirty="0">
                 <a:effectLst/>
                 <a:latin typeface="Lato" panose="020F0502020204030203" pitchFamily="34" charset="0"/>
                 <a:ea typeface="Lato" panose="020F0502020204030203" pitchFamily="34" charset="0"/>
@@ -5501,7 +6041,7 @@
               </a:rPr>
               <a:t>Cortez, P, Morais, A. “A Data Mining Approach to Predict Forest Fires using Meteorological Data”.  In J. Neves, M. F. Santos and J. Machado Eds., New Trends in Artificial Intelligence, </a:t>
             </a:r>
-            <a:endParaRPr lang="en-US" sz="3200" b="0" dirty="0">
+            <a:endParaRPr lang="en-US" sz="1600" b="0" dirty="0">
               <a:effectLst/>
               <a:latin typeface="Lato" panose="020F0502020204030203" pitchFamily="34" charset="0"/>
               <a:ea typeface="Lato" panose="020F0502020204030203" pitchFamily="34" charset="0"/>
@@ -5513,7 +6053,7 @@
               <a:buNone/>
             </a:pPr>
             <a:r>
-              <a:rPr lang="en-US" sz="3200" b="0" i="0" strike="noStrike" dirty="0">
+              <a:rPr lang="en-US" sz="1600" b="0" i="0" strike="noStrike" dirty="0">
                 <a:effectLst/>
                 <a:latin typeface="Lato" panose="020F0502020204030203" pitchFamily="34" charset="0"/>
                 <a:ea typeface="Lato" panose="020F0502020204030203" pitchFamily="34" charset="0"/>
@@ -5521,7 +6061,7 @@
               </a:rPr>
               <a:t>Proceedings of the 13th EPIA 2007 - Portuguese Conference on Artificial Intelligence, December, Guimaraes, Portugal, pp. 512-523, 2007. APPIA, ISBN-13 978-989-95618-0-9. </a:t>
             </a:r>
-            <a:endParaRPr lang="en-US" sz="3200" b="0" dirty="0">
+            <a:endParaRPr lang="en-US" sz="1600" b="0" dirty="0">
               <a:effectLst/>
               <a:latin typeface="Lato" panose="020F0502020204030203" pitchFamily="34" charset="0"/>
               <a:ea typeface="Lato" panose="020F0502020204030203" pitchFamily="34" charset="0"/>
@@ -5533,7 +6073,7 @@
               <a:buNone/>
             </a:pPr>
             <a:r>
-              <a:rPr lang="en-US" sz="3200" b="0" i="0" strike="noStrike" dirty="0">
+              <a:rPr lang="en-US" sz="1600" b="0" i="0" strike="noStrike" dirty="0">
                 <a:effectLst/>
                 <a:latin typeface="Lato" panose="020F0502020204030203" pitchFamily="34" charset="0"/>
                 <a:ea typeface="Lato" panose="020F0502020204030203" pitchFamily="34" charset="0"/>
@@ -5542,12 +6082,12 @@
               <a:t>Available at: </a:t>
             </a:r>
             <a:r>
-              <a:rPr lang="en-US" sz="3200" b="0" i="0" strike="noStrike" dirty="0">
+              <a:rPr lang="en-US" sz="1600" b="0" i="0" strike="noStrike" dirty="0">
                 <a:effectLst/>
                 <a:latin typeface="Lato" panose="020F0502020204030203" pitchFamily="34" charset="0"/>
                 <a:ea typeface="Lato" panose="020F0502020204030203" pitchFamily="34" charset="0"/>
                 <a:cs typeface="Lato" panose="020F0502020204030203" pitchFamily="34" charset="0"/>
-                <a:hlinkClick r:id="rId2">
+                <a:hlinkClick r:id="rId7">
                   <a:extLst>
                     <a:ext uri="{A12FA001-AC4F-418D-AE19-62706E023703}">
                       <ahyp:hlinkClr xmlns:ahyp="http://schemas.microsoft.com/office/drawing/2018/hyperlinkcolor" val="tx"/>
@@ -5557,7 +6097,7 @@
               </a:rPr>
               <a:t>http://www.dsi.uminho.pt/~pcortez/fires.pdf</a:t>
             </a:r>
-            <a:endParaRPr lang="en-US" sz="3200" b="0" i="0" strike="noStrike" dirty="0">
+            <a:endParaRPr lang="en-US" sz="1600" b="0" i="0" strike="noStrike" dirty="0">
               <a:effectLst/>
               <a:latin typeface="Lato" panose="020F0502020204030203" pitchFamily="34" charset="0"/>
               <a:ea typeface="Lato" panose="020F0502020204030203" pitchFamily="34" charset="0"/>
@@ -5568,7 +6108,7 @@
             <a:pPr rtl="0">
               <a:buNone/>
             </a:pPr>
-            <a:endParaRPr lang="en-US" sz="3200" dirty="0">
+            <a:endParaRPr lang="en-US" sz="1600" dirty="0">
               <a:latin typeface="Lato" panose="020F0502020204030203" pitchFamily="34" charset="0"/>
               <a:ea typeface="Lato" panose="020F0502020204030203" pitchFamily="34" charset="0"/>
               <a:cs typeface="Lato" panose="020F0502020204030203" pitchFamily="34" charset="0"/>
@@ -5579,7 +6119,7 @@
               <a:buNone/>
             </a:pPr>
             <a:r>
-              <a:rPr lang="en-US" sz="3200" b="0" dirty="0">
+              <a:rPr lang="en-US" sz="1600" b="0" dirty="0">
                 <a:effectLst/>
                 <a:latin typeface="Lato" panose="020F0502020204030203" pitchFamily="34" charset="0"/>
                 <a:ea typeface="Lato" panose="020F0502020204030203" pitchFamily="34" charset="0"/>
@@ -5588,7 +6128,7 @@
               <a:t>[2] </a:t>
             </a:r>
             <a:r>
-              <a:rPr lang="en-US" sz="3200" b="0" i="0" strike="noStrike" dirty="0">
+              <a:rPr lang="en-US" sz="1600" b="0" i="0" strike="noStrike" dirty="0">
                 <a:effectLst/>
                 <a:latin typeface="Lato" panose="020F0502020204030203" pitchFamily="34" charset="0"/>
                 <a:ea typeface="Lato" panose="020F0502020204030203" pitchFamily="34" charset="0"/>
@@ -5597,7 +6137,7 @@
               <a:t>El-</a:t>
             </a:r>
             <a:r>
-              <a:rPr lang="en-US" sz="3200" b="0" i="0" strike="noStrike" dirty="0" err="1">
+              <a:rPr lang="en-US" sz="1600" b="0" i="0" strike="noStrike" dirty="0" err="1">
                 <a:effectLst/>
                 <a:latin typeface="Lato" panose="020F0502020204030203" pitchFamily="34" charset="0"/>
                 <a:ea typeface="Lato" panose="020F0502020204030203" pitchFamily="34" charset="0"/>
@@ -5606,7 +6146,7 @@
               <a:t>Madafri</a:t>
             </a:r>
             <a:r>
-              <a:rPr lang="en-US" sz="3200" b="0" i="0" strike="noStrike" dirty="0">
+              <a:rPr lang="en-US" sz="1600" b="0" i="0" strike="noStrike" dirty="0">
                 <a:effectLst/>
                 <a:latin typeface="Lato" panose="020F0502020204030203" pitchFamily="34" charset="0"/>
                 <a:ea typeface="Lato" panose="020F0502020204030203" pitchFamily="34" charset="0"/>
@@ -5615,12 +6155,12 @@
               <a:t> I, Peña M, Olmedo-Torre N. “The Wildfire Dataset: Enhancing Deep Learning-Based Forest Fire Detection with a Diverse Evolving Open-Source Dataset Focused on Data Representativeness and a Novel Multi-Task Learning Approach”. Forests. 2023; 14(9):1697. </a:t>
             </a:r>
             <a:r>
-              <a:rPr lang="en-US" sz="3200" b="0" i="0" strike="noStrike" dirty="0">
+              <a:rPr lang="en-US" sz="1600" b="0" i="0" strike="noStrike" dirty="0">
                 <a:effectLst/>
                 <a:latin typeface="Lato" panose="020F0502020204030203" pitchFamily="34" charset="0"/>
                 <a:ea typeface="Lato" panose="020F0502020204030203" pitchFamily="34" charset="0"/>
                 <a:cs typeface="Lato" panose="020F0502020204030203" pitchFamily="34" charset="0"/>
-                <a:hlinkClick r:id="rId3">
+                <a:hlinkClick r:id="rId8">
                   <a:extLst>
                     <a:ext uri="{A12FA001-AC4F-418D-AE19-62706E023703}">
                       <ahyp:hlinkClr xmlns:ahyp="http://schemas.microsoft.com/office/drawing/2018/hyperlinkcolor" val="tx"/>
@@ -5630,7 +6170,7 @@
               </a:rPr>
               <a:t>https://doi.org/10.3390/f14091697</a:t>
             </a:r>
-            <a:endParaRPr lang="en-US" sz="3200" b="0" dirty="0">
+            <a:endParaRPr lang="en-US" sz="1600" b="0" dirty="0">
               <a:effectLst/>
               <a:latin typeface="Lato" panose="020F0502020204030203" pitchFamily="34" charset="0"/>
               <a:ea typeface="Lato" panose="020F0502020204030203" pitchFamily="34" charset="0"/>
@@ -5658,10 +6198,10 @@
       </p:sp>
       <p:pic>
         <p:nvPicPr>
-          <p:cNvPr id="12" name="Picture 11" descr="A large fire in the mountains&#10;&#10;AI-generated content may be incorrect.">
+          <p:cNvPr id="41" name="Picture 40">
             <a:extLst>
               <a:ext uri="{FF2B5EF4-FFF2-40B4-BE49-F238E27FC236}">
-                <a16:creationId xmlns:a16="http://schemas.microsoft.com/office/drawing/2014/main" id="{CC5303F7-007C-A907-F701-6BF930784B18}"/>
+                <a16:creationId xmlns:a16="http://schemas.microsoft.com/office/drawing/2014/main" id="{32403C23-A3EB-C3D0-28C6-040F2868A371}"/>
               </a:ext>
             </a:extLst>
           </p:cNvPr>
@@ -5671,69 +6211,27 @@
           <p:nvPr/>
         </p:nvPicPr>
         <p:blipFill>
-          <a:blip r:embed="rId4" cstate="print">
-            <a:extLst>
-              <a:ext uri="{28A0092B-C50C-407E-A947-70E740481C1C}">
-                <a14:useLocalDpi xmlns:a14="http://schemas.microsoft.com/office/drawing/2010/main" val="0"/>
-              </a:ext>
-            </a:extLst>
-          </a:blip>
+          <a:blip r:embed="rId9"/>
           <a:stretch>
             <a:fillRect/>
           </a:stretch>
         </p:blipFill>
         <p:spPr>
           <a:xfrm>
-            <a:off x="33838508" y="8077200"/>
-            <a:ext cx="7366761" cy="4768779"/>
+            <a:off x="9255827" y="22618220"/>
+            <a:ext cx="8530654" cy="5309897"/>
           </a:xfrm>
           <a:prstGeom prst="rect">
             <a:avLst/>
           </a:prstGeom>
         </p:spPr>
       </p:pic>
-      <p:pic>
-        <p:nvPicPr>
-          <p:cNvPr id="20" name="Picture 19" descr="A landscape with a mountain in the background&#10;&#10;AI-generated content may be incorrect.">
+      <p:sp>
+        <p:nvSpPr>
+          <p:cNvPr id="42" name="TextBox 41">
             <a:extLst>
               <a:ext uri="{FF2B5EF4-FFF2-40B4-BE49-F238E27FC236}">
-                <a16:creationId xmlns:a16="http://schemas.microsoft.com/office/drawing/2014/main" id="{86BF936D-FC3C-2128-C57D-0E65582D5707}"/>
-              </a:ext>
-            </a:extLst>
-          </p:cNvPr>
-          <p:cNvPicPr>
-            <a:picLocks noChangeAspect="1"/>
-          </p:cNvPicPr>
-          <p:nvPr/>
-        </p:nvPicPr>
-        <p:blipFill>
-          <a:blip r:embed="rId5" cstate="print">
-            <a:extLst>
-              <a:ext uri="{28A0092B-C50C-407E-A947-70E740481C1C}">
-                <a14:useLocalDpi xmlns:a14="http://schemas.microsoft.com/office/drawing/2010/main" val="0"/>
-              </a:ext>
-            </a:extLst>
-          </a:blip>
-          <a:stretch>
-            <a:fillRect/>
-          </a:stretch>
-        </p:blipFill>
-        <p:spPr>
-          <a:xfrm>
-            <a:off x="33866217" y="13335000"/>
-            <a:ext cx="7177821" cy="4784017"/>
-          </a:xfrm>
-          <a:prstGeom prst="rect">
-            <a:avLst/>
-          </a:prstGeom>
-        </p:spPr>
-      </p:pic>
-      <p:sp>
-        <p:nvSpPr>
-          <p:cNvPr id="25" name="TextBox 24">
-            <a:extLst>
-              <a:ext uri="{FF2B5EF4-FFF2-40B4-BE49-F238E27FC236}">
-                <a16:creationId xmlns:a16="http://schemas.microsoft.com/office/drawing/2014/main" id="{3F69E898-CB58-787D-3FE7-C1A472AC79CC}"/>
+                <a16:creationId xmlns:a16="http://schemas.microsoft.com/office/drawing/2014/main" id="{07EB613E-3AA7-FD30-DF13-C26ADCBC61D9}"/>
               </a:ext>
             </a:extLst>
           </p:cNvPr>
@@ -5742,368 +6240,7 @@
         </p:nvSpPr>
         <p:spPr>
           <a:xfrm>
-            <a:off x="33824653" y="18669000"/>
-            <a:ext cx="6553192" cy="954107"/>
-          </a:xfrm>
-          <a:prstGeom prst="rect">
-            <a:avLst/>
-          </a:prstGeom>
-          <a:noFill/>
-        </p:spPr>
-        <p:txBody>
-          <a:bodyPr wrap="square">
-            <a:spAutoFit/>
-          </a:bodyPr>
-          <a:lstStyle/>
-          <a:p>
-            <a:r>
-              <a:rPr lang="en-US" sz="2800" b="0" dirty="0">
-                <a:effectLst/>
-                <a:latin typeface="Lato" panose="020F0502020204030203" pitchFamily="34" charset="0"/>
-                <a:ea typeface="Lato" panose="020F0502020204030203" pitchFamily="34" charset="0"/>
-                <a:cs typeface="Lato" panose="020F0502020204030203" pitchFamily="34" charset="0"/>
-              </a:rPr>
-              <a:t>Figure 1 + 2. A “fire” and ”no-fire” image from ”The Wildfire Dataset” [2]. </a:t>
-            </a:r>
-            <a:endParaRPr lang="en-US" sz="2800" dirty="0"/>
-          </a:p>
-        </p:txBody>
-      </p:sp>
-      <p:pic>
-        <p:nvPicPr>
-          <p:cNvPr id="1026" name="Picture 2">
-            <a:extLst>
-              <a:ext uri="{FF2B5EF4-FFF2-40B4-BE49-F238E27FC236}">
-                <a16:creationId xmlns:a16="http://schemas.microsoft.com/office/drawing/2014/main" id="{ADAA3AD7-054A-0537-9858-F157E5B95B94}"/>
-              </a:ext>
-            </a:extLst>
-          </p:cNvPr>
-          <p:cNvPicPr>
-            <a:picLocks noChangeAspect="1" noChangeArrowheads="1"/>
-          </p:cNvPicPr>
-          <p:nvPr/>
-        </p:nvPicPr>
-        <p:blipFill>
-          <a:blip r:embed="rId6">
-            <a:extLst>
-              <a:ext uri="{28A0092B-C50C-407E-A947-70E740481C1C}">
-                <a14:useLocalDpi xmlns:a14="http://schemas.microsoft.com/office/drawing/2010/main" val="0"/>
-              </a:ext>
-            </a:extLst>
-          </a:blip>
-          <a:srcRect/>
-          <a:stretch>
-            <a:fillRect/>
-          </a:stretch>
-        </p:blipFill>
-        <p:spPr bwMode="auto">
-          <a:xfrm>
-            <a:off x="16145871" y="21652944"/>
-            <a:ext cx="15228016" cy="6271795"/>
-          </a:xfrm>
-          <a:prstGeom prst="rect">
-            <a:avLst/>
-          </a:prstGeom>
-          <a:noFill/>
-          <a:extLst>
-            <a:ext uri="{909E8E84-426E-40DD-AFC4-6F175D3DCCD1}">
-              <a14:hiddenFill xmlns:a14="http://schemas.microsoft.com/office/drawing/2010/main">
-                <a:solidFill>
-                  <a:srgbClr val="FFFFFF"/>
-                </a:solidFill>
-              </a14:hiddenFill>
-            </a:ext>
-          </a:extLst>
-        </p:spPr>
-      </p:pic>
-      <p:sp>
-        <p:nvSpPr>
-          <p:cNvPr id="4" name="TextBox 3">
-            <a:extLst>
-              <a:ext uri="{FF2B5EF4-FFF2-40B4-BE49-F238E27FC236}">
-                <a16:creationId xmlns:a16="http://schemas.microsoft.com/office/drawing/2014/main" id="{2A3E5D3C-D891-4D10-9A1C-BAF66B5506DC}"/>
-              </a:ext>
-            </a:extLst>
-          </p:cNvPr>
-          <p:cNvSpPr txBox="1"/>
-          <p:nvPr/>
-        </p:nvSpPr>
-        <p:spPr>
-          <a:xfrm>
-            <a:off x="18778030" y="7577134"/>
-            <a:ext cx="15228013" cy="12157174"/>
-          </a:xfrm>
-          <a:prstGeom prst="rect">
-            <a:avLst/>
-          </a:prstGeom>
-          <a:noFill/>
-        </p:spPr>
-        <p:txBody>
-          <a:bodyPr wrap="square">
-            <a:spAutoFit/>
-          </a:bodyPr>
-          <a:lstStyle/>
-          <a:p>
-            <a:pPr>
-              <a:buNone/>
-            </a:pPr>
-            <a:r>
-              <a:rPr lang="en-US" sz="4800" b="1" dirty="0"/>
-              <a:t>Multilayer Perceptron (MLP):</a:t>
-            </a:r>
-            <a:endParaRPr lang="en-US" sz="4800" dirty="0"/>
-          </a:p>
-          <a:p>
-            <a:pPr marL="685800" indent="-685800">
-              <a:buFontTx/>
-              <a:buChar char="-"/>
-            </a:pPr>
-            <a:r>
-              <a:rPr lang="en-US" sz="4000" dirty="0"/>
-              <a:t>Inputs environmental features (e.g., temperature, wind, humidity, month/day) to predict fire area.</a:t>
-            </a:r>
-          </a:p>
-          <a:p>
-            <a:pPr marL="685800" indent="-685800">
-              <a:buFontTx/>
-              <a:buChar char="-"/>
-            </a:pPr>
-            <a:endParaRPr lang="en-US" sz="4000" dirty="0"/>
-          </a:p>
-          <a:p>
-            <a:pPr marL="685800" indent="-685800">
-              <a:buFontTx/>
-              <a:buChar char="-"/>
-            </a:pPr>
-            <a:r>
-              <a:rPr lang="en-US" sz="4000" dirty="0"/>
-              <a:t>Two hidden layers with Leaky </a:t>
-            </a:r>
-            <a:r>
-              <a:rPr lang="en-US" sz="4000" dirty="0" err="1"/>
-              <a:t>ReLU</a:t>
-            </a:r>
-            <a:r>
-              <a:rPr lang="en-US" sz="4000" dirty="0"/>
-              <a:t>, L2 regularization, and batch normalization for stability and generalization.</a:t>
-            </a:r>
-          </a:p>
-          <a:p>
-            <a:pPr marL="685800" indent="-685800">
-              <a:buFontTx/>
-              <a:buChar char="-"/>
-            </a:pPr>
-            <a:endParaRPr lang="en-US" sz="4000" dirty="0"/>
-          </a:p>
-          <a:p>
-            <a:pPr marL="685800" indent="-685800">
-              <a:buFontTx/>
-              <a:buChar char="-"/>
-            </a:pPr>
-            <a:r>
-              <a:rPr lang="en-US" sz="4000" dirty="0"/>
-              <a:t>Trained using backpropagation and evaluated with MAE, RMSE, R², and MAPE.</a:t>
-            </a:r>
-          </a:p>
-          <a:p>
-            <a:pPr marL="685800" indent="-685800">
-              <a:buFontTx/>
-              <a:buChar char="-"/>
-            </a:pPr>
-            <a:endParaRPr lang="en-US" sz="4800" dirty="0"/>
-          </a:p>
-          <a:p>
-            <a:pPr>
-              <a:buNone/>
-            </a:pPr>
-            <a:r>
-              <a:rPr lang="en-US" sz="4800" b="1" dirty="0"/>
-              <a:t>Convolutional Neural Network (CNN):</a:t>
-            </a:r>
-            <a:endParaRPr lang="en-US" sz="4800" dirty="0"/>
-          </a:p>
-          <a:p>
-            <a:pPr marL="685800" indent="-685800">
-              <a:buFontTx/>
-              <a:buChar char="-"/>
-            </a:pPr>
-            <a:r>
-              <a:rPr lang="en-US" sz="4000" dirty="0"/>
-              <a:t>Classifies 32x32 RGB images into fire vs. no fire using two convolutional layers (32 &amp; 64 filters)</a:t>
-            </a:r>
-          </a:p>
-          <a:p>
-            <a:pPr marL="685800" indent="-685800">
-              <a:buFontTx/>
-              <a:buChar char="-"/>
-            </a:pPr>
-            <a:endParaRPr lang="en-US" sz="4000" dirty="0"/>
-          </a:p>
-          <a:p>
-            <a:pPr marL="685800" indent="-685800">
-              <a:buFontTx/>
-              <a:buChar char="-"/>
-            </a:pPr>
-            <a:r>
-              <a:rPr lang="en-US" sz="4000" dirty="0"/>
-              <a:t>Uses batch normalization, max pooling, and a dense layer for feature extraction and classification</a:t>
-            </a:r>
-          </a:p>
-          <a:p>
-            <a:pPr marL="685800" indent="-685800">
-              <a:buFontTx/>
-              <a:buChar char="-"/>
-            </a:pPr>
-            <a:endParaRPr lang="en-US" sz="4000" dirty="0"/>
-          </a:p>
-          <a:p>
-            <a:pPr marL="685800" indent="-685800">
-              <a:buFontTx/>
-              <a:buChar char="-"/>
-            </a:pPr>
-            <a:r>
-              <a:rPr lang="en-US" sz="4000" dirty="0"/>
-              <a:t>Final sigmoid-activated layer outputs binary probabilities; trained with binary cross-entropy loss (for sigmoid)</a:t>
-            </a:r>
-          </a:p>
-        </p:txBody>
-      </p:sp>
-      <p:cxnSp>
-        <p:nvCxnSpPr>
-          <p:cNvPr id="6" name="Straight Connector 5">
-            <a:extLst>
-              <a:ext uri="{FF2B5EF4-FFF2-40B4-BE49-F238E27FC236}">
-                <a16:creationId xmlns:a16="http://schemas.microsoft.com/office/drawing/2014/main" id="{776844DC-DB28-4EF3-E33B-7ACA4D07FCBF}"/>
-              </a:ext>
-            </a:extLst>
-          </p:cNvPr>
-          <p:cNvCxnSpPr>
-            <a:cxnSpLocks/>
-          </p:cNvCxnSpPr>
-          <p:nvPr/>
-        </p:nvCxnSpPr>
-        <p:spPr>
-          <a:xfrm>
-            <a:off x="31373887" y="20122943"/>
-            <a:ext cx="0" cy="12169523"/>
-          </a:xfrm>
-          <a:prstGeom prst="line">
-            <a:avLst/>
-          </a:prstGeom>
-          <a:ln>
-            <a:solidFill>
-              <a:srgbClr val="C00000"/>
-            </a:solidFill>
-          </a:ln>
-        </p:spPr>
-        <p:style>
-          <a:lnRef idx="2">
-            <a:schemeClr val="accent3"/>
-          </a:lnRef>
-          <a:fillRef idx="0">
-            <a:schemeClr val="accent3"/>
-          </a:fillRef>
-          <a:effectRef idx="1">
-            <a:schemeClr val="accent3"/>
-          </a:effectRef>
-          <a:fontRef idx="minor">
-            <a:schemeClr val="tx1"/>
-          </a:fontRef>
-        </p:style>
-      </p:cxnSp>
-      <p:sp>
-        <p:nvSpPr>
-          <p:cNvPr id="18" name="TextBox 17">
-            <a:extLst>
-              <a:ext uri="{FF2B5EF4-FFF2-40B4-BE49-F238E27FC236}">
-                <a16:creationId xmlns:a16="http://schemas.microsoft.com/office/drawing/2014/main" id="{352B7B01-8886-399B-CB16-AC08F4FCEEB8}"/>
-              </a:ext>
-            </a:extLst>
-          </p:cNvPr>
-          <p:cNvSpPr txBox="1"/>
-          <p:nvPr/>
-        </p:nvSpPr>
-        <p:spPr>
-          <a:xfrm>
-            <a:off x="1029545" y="22526685"/>
-            <a:ext cx="14597594" cy="4524315"/>
-          </a:xfrm>
-          <a:prstGeom prst="rect">
-            <a:avLst/>
-          </a:prstGeom>
-          <a:noFill/>
-        </p:spPr>
-        <p:txBody>
-          <a:bodyPr wrap="square">
-            <a:spAutoFit/>
-          </a:bodyPr>
-          <a:lstStyle/>
-          <a:p>
-            <a:r>
-              <a:rPr lang="en-US" sz="4800" b="1" dirty="0"/>
-              <a:t>CNN Model:</a:t>
-            </a:r>
-            <a:r>
-              <a:rPr lang="en-US" sz="4800" dirty="0"/>
-              <a:t> Achieved 82.14% validation accuracy, with moderate overfitting indicated by rising validation loss. Despite regularization the model misclassified some samples (82 false positives, 63 false negatives), suggesting potential gains from data augmentation or architecture tuning.</a:t>
-            </a:r>
-          </a:p>
-        </p:txBody>
-      </p:sp>
-      <p:sp>
-        <p:nvSpPr>
-          <p:cNvPr id="21" name="TextBox 20">
-            <a:extLst>
-              <a:ext uri="{FF2B5EF4-FFF2-40B4-BE49-F238E27FC236}">
-                <a16:creationId xmlns:a16="http://schemas.microsoft.com/office/drawing/2014/main" id="{97EC9A8A-DEDC-E50D-B03A-D639C7B5E8B5}"/>
-              </a:ext>
-            </a:extLst>
-          </p:cNvPr>
-          <p:cNvSpPr txBox="1"/>
-          <p:nvPr/>
-        </p:nvSpPr>
-        <p:spPr>
-          <a:xfrm>
-            <a:off x="15763348" y="28432727"/>
-            <a:ext cx="15554850" cy="3785652"/>
-          </a:xfrm>
-          <a:prstGeom prst="rect">
-            <a:avLst/>
-          </a:prstGeom>
-          <a:noFill/>
-        </p:spPr>
-        <p:txBody>
-          <a:bodyPr wrap="square">
-            <a:spAutoFit/>
-          </a:bodyPr>
-          <a:lstStyle/>
-          <a:p>
-            <a:r>
-              <a:rPr lang="en-US" sz="4800" b="1" dirty="0"/>
-              <a:t>MLP Model:</a:t>
-            </a:r>
-            <a:r>
-              <a:rPr lang="en-US" sz="4800" dirty="0"/>
-              <a:t> Demonstrated strong learning on training data  but failed to generalize (test R² ≈ 0), indicating overfitting and architectural mismatch for the dataset size and quality. Additional regularization and improved feature engineering are needed for better test performance.</a:t>
-            </a:r>
-          </a:p>
-        </p:txBody>
-      </p:sp>
-      <p:sp>
-        <p:nvSpPr>
-          <p:cNvPr id="22" name="TextBox 21">
-            <a:extLst>
-              <a:ext uri="{FF2B5EF4-FFF2-40B4-BE49-F238E27FC236}">
-                <a16:creationId xmlns:a16="http://schemas.microsoft.com/office/drawing/2014/main" id="{77821EE0-FE8F-E5C8-85AA-2D95F27B9095}"/>
-              </a:ext>
-            </a:extLst>
-          </p:cNvPr>
-          <p:cNvSpPr txBox="1"/>
-          <p:nvPr/>
-        </p:nvSpPr>
-        <p:spPr>
-          <a:xfrm>
-            <a:off x="16992596" y="27732620"/>
+            <a:off x="797611" y="28363121"/>
             <a:ext cx="13777885" cy="523220"/>
           </a:xfrm>
           <a:prstGeom prst="rect">
@@ -6124,117 +6261,12 @@
                 <a:ea typeface="Lato" panose="020F0502020204030203" pitchFamily="34" charset="0"/>
                 <a:cs typeface="Lato" panose="020F0502020204030203" pitchFamily="34" charset="0"/>
               </a:rPr>
-              <a:t>Figure 3 + 4: Accuracy and loss over epochs for training and validation sets for CNN.</a:t>
+              <a:t>Figure 6: Loss and R^2 over epochs of training and testing data for MLP model.</a:t>
             </a:r>
             <a:endParaRPr lang="en-US" sz="2800" dirty="0"/>
           </a:p>
         </p:txBody>
       </p:sp>
-      <p:sp>
-        <p:nvSpPr>
-          <p:cNvPr id="27" name="TextBox 26">
-            <a:extLst>
-              <a:ext uri="{FF2B5EF4-FFF2-40B4-BE49-F238E27FC236}">
-                <a16:creationId xmlns:a16="http://schemas.microsoft.com/office/drawing/2014/main" id="{720671EE-D73E-6A6A-68B2-92DBFCC5DBE6}"/>
-              </a:ext>
-            </a:extLst>
-          </p:cNvPr>
-          <p:cNvSpPr txBox="1"/>
-          <p:nvPr/>
-        </p:nvSpPr>
-        <p:spPr>
-          <a:xfrm>
-            <a:off x="1260398" y="31398587"/>
-            <a:ext cx="13777885" cy="523220"/>
-          </a:xfrm>
-          <a:prstGeom prst="rect">
-            <a:avLst/>
-          </a:prstGeom>
-          <a:noFill/>
-        </p:spPr>
-        <p:txBody>
-          <a:bodyPr wrap="square">
-            <a:spAutoFit/>
-          </a:bodyPr>
-          <a:lstStyle/>
-          <a:p>
-            <a:r>
-              <a:rPr lang="en-US" sz="2800" b="0" dirty="0">
-                <a:effectLst/>
-                <a:latin typeface="Lato" panose="020F0502020204030203" pitchFamily="34" charset="0"/>
-                <a:ea typeface="Lato" panose="020F0502020204030203" pitchFamily="34" charset="0"/>
-                <a:cs typeface="Lato" panose="020F0502020204030203" pitchFamily="34" charset="0"/>
-              </a:rPr>
-              <a:t>Figure </a:t>
-            </a:r>
-            <a:r>
-              <a:rPr lang="en-US" sz="2800" dirty="0">
-                <a:latin typeface="Lato" panose="020F0502020204030203" pitchFamily="34" charset="0"/>
-                <a:ea typeface="Lato" panose="020F0502020204030203" pitchFamily="34" charset="0"/>
-                <a:cs typeface="Lato" panose="020F0502020204030203" pitchFamily="34" charset="0"/>
-              </a:rPr>
-              <a:t>5</a:t>
-            </a:r>
-            <a:r>
-              <a:rPr lang="en-US" sz="2800" b="0" dirty="0">
-                <a:effectLst/>
-                <a:latin typeface="Lato" panose="020F0502020204030203" pitchFamily="34" charset="0"/>
-                <a:ea typeface="Lato" panose="020F0502020204030203" pitchFamily="34" charset="0"/>
-                <a:cs typeface="Lato" panose="020F0502020204030203" pitchFamily="34" charset="0"/>
-              </a:rPr>
-              <a:t>: MLP metrics containing loss for training and testing sets and R^2 value.</a:t>
-            </a:r>
-            <a:endParaRPr lang="en-US" sz="2800" dirty="0"/>
-          </a:p>
-        </p:txBody>
-      </p:sp>
-      <p:pic>
-        <p:nvPicPr>
-          <p:cNvPr id="10" name="Picture 2">
-            <a:extLst>
-              <a:ext uri="{FF2B5EF4-FFF2-40B4-BE49-F238E27FC236}">
-                <a16:creationId xmlns:a16="http://schemas.microsoft.com/office/drawing/2014/main" id="{346E2AB5-04DF-E41E-EBF3-1A6DFEC462DA}"/>
-              </a:ext>
-            </a:extLst>
-          </p:cNvPr>
-          <p:cNvPicPr>
-            <a:picLocks noChangeAspect="1" noChangeArrowheads="1"/>
-          </p:cNvPicPr>
-          <p:nvPr/>
-        </p:nvPicPr>
-        <p:blipFill>
-          <a:blip r:embed="rId7">
-            <a:extLst>
-              <a:ext uri="{28A0092B-C50C-407E-A947-70E740481C1C}">
-                <a14:useLocalDpi xmlns:a14="http://schemas.microsoft.com/office/drawing/2010/main" val="0"/>
-              </a:ext>
-            </a:extLst>
-          </a:blip>
-          <a:srcRect/>
-          <a:stretch>
-            <a:fillRect/>
-          </a:stretch>
-        </p:blipFill>
-        <p:spPr bwMode="auto">
-          <a:xfrm>
-            <a:off x="737142" y="28149712"/>
-            <a:ext cx="14824396" cy="2827088"/>
-          </a:xfrm>
-          <a:prstGeom prst="rect">
-            <a:avLst/>
-          </a:prstGeom>
-          <a:noFill/>
-          <a:extLst>
-            <a:ext uri="{909E8E84-426E-40DD-AFC4-6F175D3DCCD1}">
-              <a14:hiddenFill xmlns:a14="http://schemas.microsoft.com/office/drawing/2010/main">
-                <a:solidFill>
-                  <a:srgbClr val="FFFFFF"/>
-                </a:solidFill>
-              </a14:hiddenFill>
-            </a:ext>
-          </a:extLst>
-        </p:spPr>
-      </p:pic>
     </p:spTree>
     <p:extLst>
       <p:ext uri="{BB962C8B-B14F-4D97-AF65-F5344CB8AC3E}">
